--- a/青年聖歌I/(青年聖歌I134)真神之愛.pptx
+++ b/青年聖歌I/(青年聖歌I134)真神之愛.pptx
@@ -5,12 +5,19 @@
     <p:sldMasterId id="2147483678" r:id="rId1"/>
   </p:sldMasterIdLst>
   <p:sldIdLst>
-    <p:sldId id="256" r:id="rId2"/>
-    <p:sldId id="257" r:id="rId3"/>
-    <p:sldId id="258" r:id="rId4"/>
-    <p:sldId id="259" r:id="rId5"/>
-    <p:sldId id="260" r:id="rId6"/>
-    <p:sldId id="261" r:id="rId7"/>
+    <p:sldId id="393" r:id="rId2"/>
+    <p:sldId id="412" r:id="rId3"/>
+    <p:sldId id="413" r:id="rId4"/>
+    <p:sldId id="414" r:id="rId5"/>
+    <p:sldId id="415" r:id="rId6"/>
+    <p:sldId id="416" r:id="rId7"/>
+    <p:sldId id="417" r:id="rId8"/>
+    <p:sldId id="418" r:id="rId9"/>
+    <p:sldId id="419" r:id="rId10"/>
+    <p:sldId id="420" r:id="rId11"/>
+    <p:sldId id="421" r:id="rId12"/>
+    <p:sldId id="422" r:id="rId13"/>
+    <p:sldId id="423" r:id="rId14"/>
   </p:sldIdLst>
   <p:sldSz cx="9144000" cy="5143500" type="screen16x9"/>
   <p:notesSz cx="6858000" cy="9144000"/>
@@ -166,10 +173,9 @@
           <a:lstStyle/>
           <a:p>
             <a:r>
-              <a:rPr lang="zh-TW" altLang="en-US" smtClean="0"/>
+              <a:rPr lang="zh-TW" altLang="en-US"/>
               <a:t>按一下以編輯母片標題樣式</a:t>
             </a:r>
-            <a:endParaRPr lang="zh-TW" altLang="en-US"/>
           </a:p>
         </p:txBody>
       </p:sp>
@@ -285,10 +291,9 @@
           </a:lstStyle>
           <a:p>
             <a:r>
-              <a:rPr lang="zh-TW" altLang="en-US" smtClean="0"/>
+              <a:rPr lang="zh-TW" altLang="en-US"/>
               <a:t>按一下以編輯母片副標題樣式</a:t>
             </a:r>
-            <a:endParaRPr lang="zh-TW" altLang="en-US"/>
           </a:p>
         </p:txBody>
       </p:sp>
@@ -310,7 +315,7 @@
             <a:fld id="{BB57629D-B0A4-4A44-BE34-F116DC9A06E5}" type="datetimeFigureOut">
               <a:rPr lang="zh-TW" altLang="en-US" smtClean="0"/>
               <a:pPr/>
-              <a:t>2019/10/11</a:t>
+              <a:t>2026/1/24</a:t>
             </a:fld>
             <a:endParaRPr lang="zh-TW" altLang="en-US"/>
           </a:p>
@@ -400,10 +405,9 @@
           <a:lstStyle/>
           <a:p>
             <a:r>
-              <a:rPr lang="zh-TW" altLang="en-US" smtClean="0"/>
+              <a:rPr lang="zh-TW" altLang="en-US"/>
               <a:t>按一下以編輯母片標題樣式</a:t>
             </a:r>
-            <a:endParaRPr lang="zh-TW" altLang="en-US"/>
           </a:p>
         </p:txBody>
       </p:sp>
@@ -424,38 +428,37 @@
           <a:p>
             <a:pPr lvl="0"/>
             <a:r>
-              <a:rPr lang="zh-TW" altLang="en-US" smtClean="0"/>
+              <a:rPr lang="zh-TW" altLang="en-US"/>
               <a:t>按一下以編輯母片文字樣式</a:t>
             </a:r>
           </a:p>
           <a:p>
             <a:pPr lvl="1"/>
             <a:r>
-              <a:rPr lang="zh-TW" altLang="en-US" smtClean="0"/>
+              <a:rPr lang="zh-TW" altLang="en-US"/>
               <a:t>第二層</a:t>
             </a:r>
           </a:p>
           <a:p>
             <a:pPr lvl="2"/>
             <a:r>
-              <a:rPr lang="zh-TW" altLang="en-US" smtClean="0"/>
+              <a:rPr lang="zh-TW" altLang="en-US"/>
               <a:t>第三層</a:t>
             </a:r>
           </a:p>
           <a:p>
             <a:pPr lvl="3"/>
             <a:r>
-              <a:rPr lang="zh-TW" altLang="en-US" smtClean="0"/>
+              <a:rPr lang="zh-TW" altLang="en-US"/>
               <a:t>第四層</a:t>
             </a:r>
           </a:p>
           <a:p>
             <a:pPr lvl="4"/>
             <a:r>
-              <a:rPr lang="zh-TW" altLang="en-US" smtClean="0"/>
+              <a:rPr lang="zh-TW" altLang="en-US"/>
               <a:t>第五層</a:t>
             </a:r>
-            <a:endParaRPr lang="zh-TW" altLang="en-US"/>
           </a:p>
         </p:txBody>
       </p:sp>
@@ -477,7 +480,7 @@
             <a:fld id="{BB57629D-B0A4-4A44-BE34-F116DC9A06E5}" type="datetimeFigureOut">
               <a:rPr lang="zh-TW" altLang="en-US" smtClean="0"/>
               <a:pPr/>
-              <a:t>2019/10/11</a:t>
+              <a:t>2026/1/24</a:t>
             </a:fld>
             <a:endParaRPr lang="zh-TW" altLang="en-US"/>
           </a:p>
@@ -572,10 +575,9 @@
           <a:lstStyle/>
           <a:p>
             <a:r>
-              <a:rPr lang="zh-TW" altLang="en-US" smtClean="0"/>
+              <a:rPr lang="zh-TW" altLang="en-US"/>
               <a:t>按一下以編輯母片標題樣式</a:t>
             </a:r>
-            <a:endParaRPr lang="zh-TW" altLang="en-US"/>
           </a:p>
         </p:txBody>
       </p:sp>
@@ -601,38 +603,37 @@
           <a:p>
             <a:pPr lvl="0"/>
             <a:r>
-              <a:rPr lang="zh-TW" altLang="en-US" smtClean="0"/>
+              <a:rPr lang="zh-TW" altLang="en-US"/>
               <a:t>按一下以編輯母片文字樣式</a:t>
             </a:r>
           </a:p>
           <a:p>
             <a:pPr lvl="1"/>
             <a:r>
-              <a:rPr lang="zh-TW" altLang="en-US" smtClean="0"/>
+              <a:rPr lang="zh-TW" altLang="en-US"/>
               <a:t>第二層</a:t>
             </a:r>
           </a:p>
           <a:p>
             <a:pPr lvl="2"/>
             <a:r>
-              <a:rPr lang="zh-TW" altLang="en-US" smtClean="0"/>
+              <a:rPr lang="zh-TW" altLang="en-US"/>
               <a:t>第三層</a:t>
             </a:r>
           </a:p>
           <a:p>
             <a:pPr lvl="3"/>
             <a:r>
-              <a:rPr lang="zh-TW" altLang="en-US" smtClean="0"/>
+              <a:rPr lang="zh-TW" altLang="en-US"/>
               <a:t>第四層</a:t>
             </a:r>
           </a:p>
           <a:p>
             <a:pPr lvl="4"/>
             <a:r>
-              <a:rPr lang="zh-TW" altLang="en-US" smtClean="0"/>
+              <a:rPr lang="zh-TW" altLang="en-US"/>
               <a:t>第五層</a:t>
             </a:r>
-            <a:endParaRPr lang="zh-TW" altLang="en-US"/>
           </a:p>
         </p:txBody>
       </p:sp>
@@ -654,7 +655,7 @@
             <a:fld id="{BB57629D-B0A4-4A44-BE34-F116DC9A06E5}" type="datetimeFigureOut">
               <a:rPr lang="zh-TW" altLang="en-US" smtClean="0"/>
               <a:pPr/>
-              <a:t>2019/10/11</a:t>
+              <a:t>2026/1/24</a:t>
             </a:fld>
             <a:endParaRPr lang="zh-TW" altLang="en-US"/>
           </a:p>
@@ -744,10 +745,9 @@
           <a:lstStyle/>
           <a:p>
             <a:r>
-              <a:rPr lang="zh-TW" altLang="en-US" smtClean="0"/>
+              <a:rPr lang="zh-TW" altLang="en-US"/>
               <a:t>按一下以編輯母片標題樣式</a:t>
             </a:r>
-            <a:endParaRPr lang="zh-TW" altLang="en-US"/>
           </a:p>
         </p:txBody>
       </p:sp>
@@ -768,38 +768,37 @@
           <a:p>
             <a:pPr lvl="0"/>
             <a:r>
-              <a:rPr lang="zh-TW" altLang="en-US" smtClean="0"/>
+              <a:rPr lang="zh-TW" altLang="en-US"/>
               <a:t>按一下以編輯母片文字樣式</a:t>
             </a:r>
           </a:p>
           <a:p>
             <a:pPr lvl="1"/>
             <a:r>
-              <a:rPr lang="zh-TW" altLang="en-US" smtClean="0"/>
+              <a:rPr lang="zh-TW" altLang="en-US"/>
               <a:t>第二層</a:t>
             </a:r>
           </a:p>
           <a:p>
             <a:pPr lvl="2"/>
             <a:r>
-              <a:rPr lang="zh-TW" altLang="en-US" smtClean="0"/>
+              <a:rPr lang="zh-TW" altLang="en-US"/>
               <a:t>第三層</a:t>
             </a:r>
           </a:p>
           <a:p>
             <a:pPr lvl="3"/>
             <a:r>
-              <a:rPr lang="zh-TW" altLang="en-US" smtClean="0"/>
+              <a:rPr lang="zh-TW" altLang="en-US"/>
               <a:t>第四層</a:t>
             </a:r>
           </a:p>
           <a:p>
             <a:pPr lvl="4"/>
             <a:r>
-              <a:rPr lang="zh-TW" altLang="en-US" smtClean="0"/>
+              <a:rPr lang="zh-TW" altLang="en-US"/>
               <a:t>第五層</a:t>
             </a:r>
-            <a:endParaRPr lang="zh-TW" altLang="en-US"/>
           </a:p>
         </p:txBody>
       </p:sp>
@@ -821,7 +820,7 @@
             <a:fld id="{BB57629D-B0A4-4A44-BE34-F116DC9A06E5}" type="datetimeFigureOut">
               <a:rPr lang="zh-TW" altLang="en-US" smtClean="0"/>
               <a:pPr/>
-              <a:t>2019/10/11</a:t>
+              <a:t>2026/1/24</a:t>
             </a:fld>
             <a:endParaRPr lang="zh-TW" altLang="en-US"/>
           </a:p>
@@ -920,10 +919,9 @@
           </a:lstStyle>
           <a:p>
             <a:r>
-              <a:rPr lang="zh-TW" altLang="en-US" smtClean="0"/>
+              <a:rPr lang="zh-TW" altLang="en-US"/>
               <a:t>按一下以編輯母片標題樣式</a:t>
             </a:r>
-            <a:endParaRPr lang="zh-TW" altLang="en-US"/>
           </a:p>
         </p:txBody>
       </p:sp>
@@ -1040,7 +1038,7 @@
           <a:p>
             <a:pPr lvl="0"/>
             <a:r>
-              <a:rPr lang="zh-TW" altLang="en-US" smtClean="0"/>
+              <a:rPr lang="zh-TW" altLang="en-US"/>
               <a:t>按一下以編輯母片文字樣式</a:t>
             </a:r>
           </a:p>
@@ -1064,7 +1062,7 @@
             <a:fld id="{BB57629D-B0A4-4A44-BE34-F116DC9A06E5}" type="datetimeFigureOut">
               <a:rPr lang="zh-TW" altLang="en-US" smtClean="0"/>
               <a:pPr/>
-              <a:t>2019/10/11</a:t>
+              <a:t>2026/1/24</a:t>
             </a:fld>
             <a:endParaRPr lang="zh-TW" altLang="en-US"/>
           </a:p>
@@ -1154,10 +1152,9 @@
           <a:lstStyle/>
           <a:p>
             <a:r>
-              <a:rPr lang="zh-TW" altLang="en-US" smtClean="0"/>
+              <a:rPr lang="zh-TW" altLang="en-US"/>
               <a:t>按一下以編輯母片標題樣式</a:t>
             </a:r>
-            <a:endParaRPr lang="zh-TW" altLang="en-US"/>
           </a:p>
         </p:txBody>
       </p:sp>
@@ -1211,38 +1208,37 @@
           <a:p>
             <a:pPr lvl="0"/>
             <a:r>
-              <a:rPr lang="zh-TW" altLang="en-US" smtClean="0"/>
+              <a:rPr lang="zh-TW" altLang="en-US"/>
               <a:t>按一下以編輯母片文字樣式</a:t>
             </a:r>
           </a:p>
           <a:p>
             <a:pPr lvl="1"/>
             <a:r>
-              <a:rPr lang="zh-TW" altLang="en-US" smtClean="0"/>
+              <a:rPr lang="zh-TW" altLang="en-US"/>
               <a:t>第二層</a:t>
             </a:r>
           </a:p>
           <a:p>
             <a:pPr lvl="2"/>
             <a:r>
-              <a:rPr lang="zh-TW" altLang="en-US" smtClean="0"/>
+              <a:rPr lang="zh-TW" altLang="en-US"/>
               <a:t>第三層</a:t>
             </a:r>
           </a:p>
           <a:p>
             <a:pPr lvl="3"/>
             <a:r>
-              <a:rPr lang="zh-TW" altLang="en-US" smtClean="0"/>
+              <a:rPr lang="zh-TW" altLang="en-US"/>
               <a:t>第四層</a:t>
             </a:r>
           </a:p>
           <a:p>
             <a:pPr lvl="4"/>
             <a:r>
-              <a:rPr lang="zh-TW" altLang="en-US" smtClean="0"/>
+              <a:rPr lang="zh-TW" altLang="en-US"/>
               <a:t>第五層</a:t>
             </a:r>
-            <a:endParaRPr lang="zh-TW" altLang="en-US"/>
           </a:p>
         </p:txBody>
       </p:sp>
@@ -1296,38 +1292,37 @@
           <a:p>
             <a:pPr lvl="0"/>
             <a:r>
-              <a:rPr lang="zh-TW" altLang="en-US" smtClean="0"/>
+              <a:rPr lang="zh-TW" altLang="en-US"/>
               <a:t>按一下以編輯母片文字樣式</a:t>
             </a:r>
           </a:p>
           <a:p>
             <a:pPr lvl="1"/>
             <a:r>
-              <a:rPr lang="zh-TW" altLang="en-US" smtClean="0"/>
+              <a:rPr lang="zh-TW" altLang="en-US"/>
               <a:t>第二層</a:t>
             </a:r>
           </a:p>
           <a:p>
             <a:pPr lvl="2"/>
             <a:r>
-              <a:rPr lang="zh-TW" altLang="en-US" smtClean="0"/>
+              <a:rPr lang="zh-TW" altLang="en-US"/>
               <a:t>第三層</a:t>
             </a:r>
           </a:p>
           <a:p>
             <a:pPr lvl="3"/>
             <a:r>
-              <a:rPr lang="zh-TW" altLang="en-US" smtClean="0"/>
+              <a:rPr lang="zh-TW" altLang="en-US"/>
               <a:t>第四層</a:t>
             </a:r>
           </a:p>
           <a:p>
             <a:pPr lvl="4"/>
             <a:r>
-              <a:rPr lang="zh-TW" altLang="en-US" smtClean="0"/>
+              <a:rPr lang="zh-TW" altLang="en-US"/>
               <a:t>第五層</a:t>
             </a:r>
-            <a:endParaRPr lang="zh-TW" altLang="en-US"/>
           </a:p>
         </p:txBody>
       </p:sp>
@@ -1349,7 +1344,7 @@
             <a:fld id="{BB57629D-B0A4-4A44-BE34-F116DC9A06E5}" type="datetimeFigureOut">
               <a:rPr lang="zh-TW" altLang="en-US" smtClean="0"/>
               <a:pPr/>
-              <a:t>2019/10/11</a:t>
+              <a:t>2026/1/24</a:t>
             </a:fld>
             <a:endParaRPr lang="zh-TW" altLang="en-US"/>
           </a:p>
@@ -1443,10 +1438,9 @@
           </a:lstStyle>
           <a:p>
             <a:r>
-              <a:rPr lang="zh-TW" altLang="en-US" smtClean="0"/>
+              <a:rPr lang="zh-TW" altLang="en-US"/>
               <a:t>按一下以編輯母片標題樣式</a:t>
             </a:r>
-            <a:endParaRPr lang="zh-TW" altLang="en-US"/>
           </a:p>
         </p:txBody>
       </p:sp>
@@ -1509,7 +1503,7 @@
           <a:p>
             <a:pPr lvl="0"/>
             <a:r>
-              <a:rPr lang="zh-TW" altLang="en-US" smtClean="0"/>
+              <a:rPr lang="zh-TW" altLang="en-US"/>
               <a:t>按一下以編輯母片文字樣式</a:t>
             </a:r>
           </a:p>
@@ -1565,38 +1559,37 @@
           <a:p>
             <a:pPr lvl="0"/>
             <a:r>
-              <a:rPr lang="zh-TW" altLang="en-US" smtClean="0"/>
+              <a:rPr lang="zh-TW" altLang="en-US"/>
               <a:t>按一下以編輯母片文字樣式</a:t>
             </a:r>
           </a:p>
           <a:p>
             <a:pPr lvl="1"/>
             <a:r>
-              <a:rPr lang="zh-TW" altLang="en-US" smtClean="0"/>
+              <a:rPr lang="zh-TW" altLang="en-US"/>
               <a:t>第二層</a:t>
             </a:r>
           </a:p>
           <a:p>
             <a:pPr lvl="2"/>
             <a:r>
-              <a:rPr lang="zh-TW" altLang="en-US" smtClean="0"/>
+              <a:rPr lang="zh-TW" altLang="en-US"/>
               <a:t>第三層</a:t>
             </a:r>
           </a:p>
           <a:p>
             <a:pPr lvl="3"/>
             <a:r>
-              <a:rPr lang="zh-TW" altLang="en-US" smtClean="0"/>
+              <a:rPr lang="zh-TW" altLang="en-US"/>
               <a:t>第四層</a:t>
             </a:r>
           </a:p>
           <a:p>
             <a:pPr lvl="4"/>
             <a:r>
-              <a:rPr lang="zh-TW" altLang="en-US" smtClean="0"/>
+              <a:rPr lang="zh-TW" altLang="en-US"/>
               <a:t>第五層</a:t>
             </a:r>
-            <a:endParaRPr lang="zh-TW" altLang="en-US"/>
           </a:p>
         </p:txBody>
       </p:sp>
@@ -1659,7 +1652,7 @@
           <a:p>
             <a:pPr lvl="0"/>
             <a:r>
-              <a:rPr lang="zh-TW" altLang="en-US" smtClean="0"/>
+              <a:rPr lang="zh-TW" altLang="en-US"/>
               <a:t>按一下以編輯母片文字樣式</a:t>
             </a:r>
           </a:p>
@@ -1715,38 +1708,37 @@
           <a:p>
             <a:pPr lvl="0"/>
             <a:r>
-              <a:rPr lang="zh-TW" altLang="en-US" smtClean="0"/>
+              <a:rPr lang="zh-TW" altLang="en-US"/>
               <a:t>按一下以編輯母片文字樣式</a:t>
             </a:r>
           </a:p>
           <a:p>
             <a:pPr lvl="1"/>
             <a:r>
-              <a:rPr lang="zh-TW" altLang="en-US" smtClean="0"/>
+              <a:rPr lang="zh-TW" altLang="en-US"/>
               <a:t>第二層</a:t>
             </a:r>
           </a:p>
           <a:p>
             <a:pPr lvl="2"/>
             <a:r>
-              <a:rPr lang="zh-TW" altLang="en-US" smtClean="0"/>
+              <a:rPr lang="zh-TW" altLang="en-US"/>
               <a:t>第三層</a:t>
             </a:r>
           </a:p>
           <a:p>
             <a:pPr lvl="3"/>
             <a:r>
-              <a:rPr lang="zh-TW" altLang="en-US" smtClean="0"/>
+              <a:rPr lang="zh-TW" altLang="en-US"/>
               <a:t>第四層</a:t>
             </a:r>
           </a:p>
           <a:p>
             <a:pPr lvl="4"/>
             <a:r>
-              <a:rPr lang="zh-TW" altLang="en-US" smtClean="0"/>
+              <a:rPr lang="zh-TW" altLang="en-US"/>
               <a:t>第五層</a:t>
             </a:r>
-            <a:endParaRPr lang="zh-TW" altLang="en-US"/>
           </a:p>
         </p:txBody>
       </p:sp>
@@ -1768,7 +1760,7 @@
             <a:fld id="{BB57629D-B0A4-4A44-BE34-F116DC9A06E5}" type="datetimeFigureOut">
               <a:rPr lang="zh-TW" altLang="en-US" smtClean="0"/>
               <a:pPr/>
-              <a:t>2019/10/11</a:t>
+              <a:t>2026/1/24</a:t>
             </a:fld>
             <a:endParaRPr lang="zh-TW" altLang="en-US"/>
           </a:p>
@@ -1858,10 +1850,9 @@
           <a:lstStyle/>
           <a:p>
             <a:r>
-              <a:rPr lang="zh-TW" altLang="en-US" smtClean="0"/>
+              <a:rPr lang="zh-TW" altLang="en-US"/>
               <a:t>按一下以編輯母片標題樣式</a:t>
             </a:r>
-            <a:endParaRPr lang="zh-TW" altLang="en-US"/>
           </a:p>
         </p:txBody>
       </p:sp>
@@ -1883,7 +1874,7 @@
             <a:fld id="{BB57629D-B0A4-4A44-BE34-F116DC9A06E5}" type="datetimeFigureOut">
               <a:rPr lang="zh-TW" altLang="en-US" smtClean="0"/>
               <a:pPr/>
-              <a:t>2019/10/11</a:t>
+              <a:t>2026/1/24</a:t>
             </a:fld>
             <a:endParaRPr lang="zh-TW" altLang="en-US"/>
           </a:p>
@@ -1975,7 +1966,7 @@
             <a:fld id="{BB57629D-B0A4-4A44-BE34-F116DC9A06E5}" type="datetimeFigureOut">
               <a:rPr lang="zh-TW" altLang="en-US" smtClean="0"/>
               <a:pPr/>
-              <a:t>2019/10/11</a:t>
+              <a:t>2026/1/24</a:t>
             </a:fld>
             <a:endParaRPr lang="zh-TW" altLang="en-US"/>
           </a:p>
@@ -2074,10 +2065,9 @@
           </a:lstStyle>
           <a:p>
             <a:r>
-              <a:rPr lang="zh-TW" altLang="en-US" smtClean="0"/>
+              <a:rPr lang="zh-TW" altLang="en-US"/>
               <a:t>按一下以編輯母片標題樣式</a:t>
             </a:r>
-            <a:endParaRPr lang="zh-TW" altLang="en-US"/>
           </a:p>
         </p:txBody>
       </p:sp>
@@ -2131,38 +2121,37 @@
           <a:p>
             <a:pPr lvl="0"/>
             <a:r>
-              <a:rPr lang="zh-TW" altLang="en-US" smtClean="0"/>
+              <a:rPr lang="zh-TW" altLang="en-US"/>
               <a:t>按一下以編輯母片文字樣式</a:t>
             </a:r>
           </a:p>
           <a:p>
             <a:pPr lvl="1"/>
             <a:r>
-              <a:rPr lang="zh-TW" altLang="en-US" smtClean="0"/>
+              <a:rPr lang="zh-TW" altLang="en-US"/>
               <a:t>第二層</a:t>
             </a:r>
           </a:p>
           <a:p>
             <a:pPr lvl="2"/>
             <a:r>
-              <a:rPr lang="zh-TW" altLang="en-US" smtClean="0"/>
+              <a:rPr lang="zh-TW" altLang="en-US"/>
               <a:t>第三層</a:t>
             </a:r>
           </a:p>
           <a:p>
             <a:pPr lvl="3"/>
             <a:r>
-              <a:rPr lang="zh-TW" altLang="en-US" smtClean="0"/>
+              <a:rPr lang="zh-TW" altLang="en-US"/>
               <a:t>第四層</a:t>
             </a:r>
           </a:p>
           <a:p>
             <a:pPr lvl="4"/>
             <a:r>
-              <a:rPr lang="zh-TW" altLang="en-US" smtClean="0"/>
+              <a:rPr lang="zh-TW" altLang="en-US"/>
               <a:t>第五層</a:t>
             </a:r>
-            <a:endParaRPr lang="zh-TW" altLang="en-US"/>
           </a:p>
         </p:txBody>
       </p:sp>
@@ -2225,7 +2214,7 @@
           <a:p>
             <a:pPr lvl="0"/>
             <a:r>
-              <a:rPr lang="zh-TW" altLang="en-US" smtClean="0"/>
+              <a:rPr lang="zh-TW" altLang="en-US"/>
               <a:t>按一下以編輯母片文字樣式</a:t>
             </a:r>
           </a:p>
@@ -2249,7 +2238,7 @@
             <a:fld id="{BB57629D-B0A4-4A44-BE34-F116DC9A06E5}" type="datetimeFigureOut">
               <a:rPr lang="zh-TW" altLang="en-US" smtClean="0"/>
               <a:pPr/>
-              <a:t>2019/10/11</a:t>
+              <a:t>2026/1/24</a:t>
             </a:fld>
             <a:endParaRPr lang="zh-TW" altLang="en-US"/>
           </a:p>
@@ -2348,10 +2337,9 @@
           </a:lstStyle>
           <a:p>
             <a:r>
-              <a:rPr lang="zh-TW" altLang="en-US" smtClean="0"/>
+              <a:rPr lang="zh-TW" altLang="en-US"/>
               <a:t>按一下以編輯母片標題樣式</a:t>
             </a:r>
-            <a:endParaRPr lang="zh-TW" altLang="en-US"/>
           </a:p>
         </p:txBody>
       </p:sp>
@@ -2413,10 +2401,9 @@
           </a:lstStyle>
           <a:p>
             <a:r>
-              <a:rPr lang="zh-TW" altLang="en-US" smtClean="0"/>
+              <a:rPr lang="zh-TW" altLang="en-US"/>
               <a:t>按一下圖示以新增圖片</a:t>
             </a:r>
-            <a:endParaRPr lang="zh-TW" altLang="en-US"/>
           </a:p>
         </p:txBody>
       </p:sp>
@@ -2479,7 +2466,7 @@
           <a:p>
             <a:pPr lvl="0"/>
             <a:r>
-              <a:rPr lang="zh-TW" altLang="en-US" smtClean="0"/>
+              <a:rPr lang="zh-TW" altLang="en-US"/>
               <a:t>按一下以編輯母片文字樣式</a:t>
             </a:r>
           </a:p>
@@ -2503,7 +2490,7 @@
             <a:fld id="{BB57629D-B0A4-4A44-BE34-F116DC9A06E5}" type="datetimeFigureOut">
               <a:rPr lang="zh-TW" altLang="en-US" smtClean="0"/>
               <a:pPr/>
-              <a:t>2019/10/11</a:t>
+              <a:t>2026/1/24</a:t>
             </a:fld>
             <a:endParaRPr lang="zh-TW" altLang="en-US"/>
           </a:p>
@@ -2613,10 +2600,9 @@
           <a:lstStyle/>
           <a:p>
             <a:r>
-              <a:rPr lang="zh-TW" altLang="en-US" smtClean="0"/>
+              <a:rPr lang="zh-TW" altLang="en-US"/>
               <a:t>按一下以編輯母片標題樣式</a:t>
             </a:r>
-            <a:endParaRPr lang="zh-TW" altLang="en-US"/>
           </a:p>
         </p:txBody>
       </p:sp>
@@ -2647,38 +2633,37 @@
           <a:p>
             <a:pPr lvl="0"/>
             <a:r>
-              <a:rPr lang="zh-TW" altLang="en-US" smtClean="0"/>
+              <a:rPr lang="zh-TW" altLang="en-US"/>
               <a:t>按一下以編輯母片文字樣式</a:t>
             </a:r>
           </a:p>
           <a:p>
             <a:pPr lvl="1"/>
             <a:r>
-              <a:rPr lang="zh-TW" altLang="en-US" smtClean="0"/>
+              <a:rPr lang="zh-TW" altLang="en-US"/>
               <a:t>第二層</a:t>
             </a:r>
           </a:p>
           <a:p>
             <a:pPr lvl="2"/>
             <a:r>
-              <a:rPr lang="zh-TW" altLang="en-US" smtClean="0"/>
+              <a:rPr lang="zh-TW" altLang="en-US"/>
               <a:t>第三層</a:t>
             </a:r>
           </a:p>
           <a:p>
             <a:pPr lvl="3"/>
             <a:r>
-              <a:rPr lang="zh-TW" altLang="en-US" smtClean="0"/>
+              <a:rPr lang="zh-TW" altLang="en-US"/>
               <a:t>第四層</a:t>
             </a:r>
           </a:p>
           <a:p>
             <a:pPr lvl="4"/>
             <a:r>
-              <a:rPr lang="zh-TW" altLang="en-US" smtClean="0"/>
+              <a:rPr lang="zh-TW" altLang="en-US"/>
               <a:t>第五層</a:t>
             </a:r>
-            <a:endParaRPr lang="zh-TW" altLang="en-US"/>
           </a:p>
         </p:txBody>
       </p:sp>
@@ -2718,7 +2703,7 @@
             <a:fld id="{BB57629D-B0A4-4A44-BE34-F116DC9A06E5}" type="datetimeFigureOut">
               <a:rPr lang="zh-TW" altLang="en-US" smtClean="0"/>
               <a:pPr/>
-              <a:t>2019/10/11</a:t>
+              <a:t>2026/1/24</a:t>
             </a:fld>
             <a:endParaRPr lang="zh-TW" altLang="en-US"/>
           </a:p>
@@ -3091,7 +3076,7 @@
       </p:grpSpPr>
       <p:sp>
         <p:nvSpPr>
-          <p:cNvPr id="2" name="標題 1"/>
+          <p:cNvPr id="4" name="標題 3"/>
           <p:cNvSpPr>
             <a:spLocks noGrp="1"/>
           </p:cNvSpPr>
@@ -3099,36 +3084,167 @@
             <p:ph type="title"/>
           </p:nvPr>
         </p:nvSpPr>
-        <p:spPr/>
+        <p:spPr>
+          <a:xfrm>
+            <a:off x="0" y="1995686"/>
+            <a:ext cx="9144000" cy="857250"/>
+          </a:xfrm>
+        </p:spPr>
         <p:txBody>
           <a:bodyPr>
-            <a:normAutofit/>
+            <a:noAutofit/>
           </a:bodyPr>
           <a:lstStyle/>
           <a:p>
             <a:r>
-              <a:rPr lang="zh-CN" altLang="en-US" sz="4000" b="1" dirty="0" smtClean="0">
+              <a:rPr lang="zh-CN" altLang="en-US" sz="4000" b="1" u="sng" dirty="0">
+                <a:solidFill>
+                  <a:srgbClr val="660033"/>
+                </a:solidFill>
+                <a:effectLst>
+                  <a:outerShdw blurRad="38100" dist="38100" dir="2700000" algn="tl">
+                    <a:srgbClr val="000000">
+                      <a:alpha val="43137"/>
+                    </a:srgbClr>
+                  </a:outerShdw>
+                </a:effectLst>
+                <a:latin typeface="微軟正黑體" pitchFamily="34" charset="-120"/>
+                <a:ea typeface="微軟正黑體" pitchFamily="34" charset="-120"/>
+              </a:rPr>
+              <a:t>青年聖歌 </a:t>
+            </a:r>
+            <a:r>
+              <a:rPr lang="en-US" altLang="zh-CN" sz="4000" b="1" u="sng" dirty="0">
+                <a:solidFill>
+                  <a:srgbClr val="660033"/>
+                </a:solidFill>
+                <a:effectLst>
+                  <a:outerShdw blurRad="38100" dist="38100" dir="2700000" algn="tl">
+                    <a:srgbClr val="000000">
+                      <a:alpha val="43137"/>
+                    </a:srgbClr>
+                  </a:outerShdw>
+                </a:effectLst>
+                <a:latin typeface="微軟正黑體" pitchFamily="34" charset="-120"/>
+                <a:ea typeface="微軟正黑體" pitchFamily="34" charset="-120"/>
+              </a:rPr>
+              <a:t>I</a:t>
+            </a:r>
+            <a:r>
+              <a:rPr lang="zh-CN" altLang="en-US" sz="4000" b="1" u="sng" dirty="0">
+                <a:solidFill>
+                  <a:srgbClr val="660033"/>
+                </a:solidFill>
+                <a:effectLst>
+                  <a:outerShdw blurRad="38100" dist="38100" dir="2700000" algn="tl">
+                    <a:srgbClr val="000000">
+                      <a:alpha val="43137"/>
+                    </a:srgbClr>
+                  </a:outerShdw>
+                </a:effectLst>
+                <a:latin typeface="微軟正黑體" pitchFamily="34" charset="-120"/>
+                <a:ea typeface="微軟正黑體" pitchFamily="34" charset="-120"/>
+              </a:rPr>
+              <a:t> </a:t>
+            </a:r>
+            <a:r>
+              <a:rPr lang="en-US" altLang="zh-CN" sz="4000" b="1" u="sng" dirty="0">
+                <a:solidFill>
+                  <a:srgbClr val="660033"/>
+                </a:solidFill>
+                <a:effectLst>
+                  <a:outerShdw blurRad="38100" dist="38100" dir="2700000" algn="tl">
+                    <a:srgbClr val="000000">
+                      <a:alpha val="43137"/>
+                    </a:srgbClr>
+                  </a:outerShdw>
+                </a:effectLst>
+                <a:latin typeface="微軟正黑體" pitchFamily="34" charset="-120"/>
+                <a:ea typeface="微軟正黑體" pitchFamily="34" charset="-120"/>
+              </a:rPr>
+              <a:t>134</a:t>
+            </a:r>
+            <a:br>
+              <a:rPr lang="en-US" altLang="zh-CN" sz="5400" b="1" i="1" dirty="0">
+                <a:solidFill>
+                  <a:srgbClr val="660033"/>
+                </a:solidFill>
+                <a:effectLst>
+                  <a:outerShdw blurRad="38100" dist="38100" dir="2700000" algn="tl">
+                    <a:srgbClr val="000000">
+                      <a:alpha val="43137"/>
+                    </a:srgbClr>
+                  </a:outerShdw>
+                </a:effectLst>
+                <a:latin typeface="微軟正黑體" pitchFamily="34" charset="-120"/>
+                <a:ea typeface="微軟正黑體" pitchFamily="34" charset="-120"/>
+              </a:rPr>
+            </a:br>
+            <a:r>
+              <a:rPr lang="zh-TW" altLang="en-US" sz="6000" b="1" dirty="0">
                 <a:solidFill>
                   <a:srgbClr val="000066"/>
                 </a:solidFill>
+                <a:effectLst>
+                  <a:outerShdw blurRad="38100" dist="38100" dir="2700000" algn="tl">
+                    <a:srgbClr val="000000">
+                      <a:alpha val="43137"/>
+                    </a:srgbClr>
+                  </a:outerShdw>
+                </a:effectLst>
                 <a:latin typeface="微軟正黑體" pitchFamily="34" charset="-120"/>
                 <a:ea typeface="微軟正黑體" pitchFamily="34" charset="-120"/>
               </a:rPr>
               <a:t>真神之愛</a:t>
             </a:r>
-            <a:endParaRPr lang="zh-TW" altLang="en-US" sz="4000" b="1" dirty="0">
-              <a:solidFill>
-                <a:srgbClr val="000066"/>
-              </a:solidFill>
-              <a:latin typeface="微軟正黑體" pitchFamily="34" charset="-120"/>
-              <a:ea typeface="微軟正黑體" pitchFamily="34" charset="-120"/>
-            </a:endParaRPr>
-          </a:p>
-        </p:txBody>
-      </p:sp>
-      <p:sp>
-        <p:nvSpPr>
-          <p:cNvPr id="4" name="內容版面配置區 3"/>
+          </a:p>
+        </p:txBody>
+      </p:sp>
+    </p:spTree>
+    <p:extLst>
+      <p:ext uri="{BB962C8B-B14F-4D97-AF65-F5344CB8AC3E}">
+        <p14:creationId xmlns:p14="http://schemas.microsoft.com/office/powerpoint/2010/main" val="3724263107"/>
+      </p:ext>
+    </p:extLst>
+  </p:cSld>
+  <p:clrMapOvr>
+    <a:masterClrMapping/>
+  </p:clrMapOvr>
+</p:sld>
+</file>
+
+<file path=ppt/slides/slide10.xml><?xml version="1.0" encoding="utf-8"?>
+<p:sld xmlns:a="http://schemas.openxmlformats.org/drawingml/2006/main" xmlns:r="http://schemas.openxmlformats.org/officeDocument/2006/relationships" xmlns:p="http://schemas.openxmlformats.org/presentationml/2006/main">
+  <p:cSld>
+    <p:spTree>
+      <p:nvGrpSpPr>
+        <p:cNvPr id="1" name="">
+          <a:extLst>
+            <a:ext uri="{FF2B5EF4-FFF2-40B4-BE49-F238E27FC236}">
+              <a16:creationId xmlns:a16="http://schemas.microsoft.com/office/drawing/2014/main" id="{92E7C05A-0B2E-06E9-5430-9F1993D60960}"/>
+            </a:ext>
+          </a:extLst>
+        </p:cNvPr>
+        <p:cNvGrpSpPr/>
+        <p:nvPr/>
+      </p:nvGrpSpPr>
+      <p:grpSpPr>
+        <a:xfrm>
+          <a:off x="0" y="0"/>
+          <a:ext cx="0" cy="0"/>
+          <a:chOff x="0" y="0"/>
+          <a:chExt cx="0" cy="0"/>
+        </a:xfrm>
+      </p:grpSpPr>
+      <p:sp>
+        <p:nvSpPr>
+          <p:cNvPr id="5" name="內容版面配置區 4">
+            <a:extLst>
+              <a:ext uri="{FF2B5EF4-FFF2-40B4-BE49-F238E27FC236}">
+                <a16:creationId xmlns:a16="http://schemas.microsoft.com/office/drawing/2014/main" id="{71712C83-D2B3-4247-B675-52FBF4373ADE}"/>
+              </a:ext>
+            </a:extLst>
+          </p:cNvPr>
           <p:cNvSpPr>
             <a:spLocks noGrp="1"/>
           </p:cNvSpPr>
@@ -3136,122 +3252,65 @@
             <p:ph idx="1"/>
           </p:nvPr>
         </p:nvSpPr>
-        <p:spPr/>
-        <p:txBody>
-          <a:bodyPr>
-            <a:noAutofit/>
+        <p:spPr>
+          <a:xfrm>
+            <a:off x="0" y="1563639"/>
+            <a:ext cx="9144000" cy="1803647"/>
+          </a:xfrm>
+        </p:spPr>
+        <p:txBody>
+          <a:bodyPr anchor="ctr">
+            <a:normAutofit/>
           </a:bodyPr>
           <a:lstStyle/>
           <a:p>
-            <a:pPr algn="ctr">
+            <a:pPr marL="0" indent="0" algn="ctr">
               <a:buNone/>
             </a:pPr>
             <a:r>
-              <a:rPr lang="zh-CN" altLang="en-US" sz="4800" b="1" dirty="0" smtClean="0">
+              <a:rPr lang="zh-TW" altLang="en-US" sz="4800" b="1" dirty="0">
                 <a:solidFill>
                   <a:srgbClr val="000066"/>
                 </a:solidFill>
-                <a:latin typeface="微軟正黑體" pitchFamily="34" charset="-120"/>
-                <a:ea typeface="微軟正黑體" pitchFamily="34" charset="-120"/>
+                <a:latin typeface="Microsoft JhengHei" pitchFamily="34" charset="-120"/>
+                <a:ea typeface="Microsoft JhengHei" pitchFamily="34" charset="-120"/>
               </a:rPr>
-              <a:t>真神之愛 偉大無窮</a:t>
-            </a:r>
-            <a:endParaRPr lang="en-US" altLang="zh-CN" sz="4800" b="1" dirty="0" smtClean="0">
-              <a:solidFill>
-                <a:srgbClr val="000066"/>
-              </a:solidFill>
-              <a:latin typeface="微軟正黑體" pitchFamily="34" charset="-120"/>
-              <a:ea typeface="微軟正黑體" pitchFamily="34" charset="-120"/>
-            </a:endParaRPr>
-          </a:p>
-          <a:p>
-            <a:pPr algn="ctr">
+              <a:t>耗盡智力  描寫神愛</a:t>
+            </a:r>
+          </a:p>
+          <a:p>
+            <a:pPr marL="0" indent="0" algn="ctr">
               <a:buNone/>
             </a:pPr>
             <a:r>
-              <a:rPr lang="zh-CN" altLang="en-US" sz="4800" b="1" dirty="0" smtClean="0">
+              <a:rPr lang="zh-TW" altLang="en-US" sz="4800" b="1" dirty="0">
                 <a:solidFill>
                   <a:srgbClr val="000066"/>
                 </a:solidFill>
-                <a:latin typeface="微軟正黑體" pitchFamily="34" charset="-120"/>
-                <a:ea typeface="微軟正黑體" pitchFamily="34" charset="-120"/>
+                <a:latin typeface="Microsoft JhengHei" pitchFamily="34" charset="-120"/>
+                <a:ea typeface="Microsoft JhengHei" pitchFamily="34" charset="-120"/>
               </a:rPr>
-              <a:t>口舌筆墨 難以形容</a:t>
-            </a:r>
-            <a:endParaRPr lang="en-US" altLang="zh-CN" sz="4800" b="1" dirty="0" smtClean="0">
-              <a:solidFill>
-                <a:srgbClr val="000066"/>
-              </a:solidFill>
-              <a:latin typeface="微軟正黑體" pitchFamily="34" charset="-120"/>
-              <a:ea typeface="微軟正黑體" pitchFamily="34" charset="-120"/>
-            </a:endParaRPr>
-          </a:p>
-          <a:p>
-            <a:pPr algn="ctr">
-              <a:buNone/>
-            </a:pPr>
-            <a:r>
-              <a:rPr lang="zh-CN" altLang="en-US" sz="4800" b="1" dirty="0" smtClean="0">
-                <a:solidFill>
-                  <a:srgbClr val="000066"/>
-                </a:solidFill>
-                <a:latin typeface="微軟正黑體" pitchFamily="34" charset="-120"/>
-                <a:ea typeface="微軟正黑體" pitchFamily="34" charset="-120"/>
-              </a:rPr>
-              <a:t>高超諸星 深達地獄</a:t>
-            </a:r>
-            <a:endParaRPr lang="en-US" altLang="zh-CN" sz="4800" b="1" dirty="0" smtClean="0">
-              <a:solidFill>
-                <a:srgbClr val="000066"/>
-              </a:solidFill>
-              <a:latin typeface="微軟正黑體" pitchFamily="34" charset="-120"/>
-              <a:ea typeface="微軟正黑體" pitchFamily="34" charset="-120"/>
-            </a:endParaRPr>
-          </a:p>
-          <a:p>
-            <a:pPr algn="ctr">
-              <a:buNone/>
-            </a:pPr>
-            <a:r>
-              <a:rPr lang="zh-CN" altLang="en-US" sz="4800" b="1" dirty="0">
-                <a:solidFill>
-                  <a:srgbClr val="000066"/>
-                </a:solidFill>
-                <a:latin typeface="微軟正黑體" pitchFamily="34" charset="-120"/>
-                <a:ea typeface="微軟正黑體" pitchFamily="34" charset="-120"/>
-              </a:rPr>
-              <a:t>長</a:t>
-            </a:r>
-            <a:r>
-              <a:rPr lang="zh-CN" altLang="en-US" sz="4800" b="1" dirty="0" smtClean="0">
-                <a:solidFill>
-                  <a:srgbClr val="000066"/>
-                </a:solidFill>
-                <a:latin typeface="微軟正黑體" pitchFamily="34" charset="-120"/>
-                <a:ea typeface="微軟正黑體" pitchFamily="34" charset="-120"/>
-              </a:rPr>
-              <a:t>闊高深 世無相同</a:t>
-            </a:r>
-            <a:endParaRPr lang="zh-TW" altLang="en-US" sz="4800" b="1" dirty="0">
-              <a:solidFill>
-                <a:srgbClr val="000066"/>
-              </a:solidFill>
-              <a:latin typeface="微軟正黑體" pitchFamily="34" charset="-120"/>
-              <a:ea typeface="微軟正黑體" pitchFamily="34" charset="-120"/>
-            </a:endParaRPr>
-          </a:p>
-        </p:txBody>
-      </p:sp>
-      <p:sp>
-        <p:nvSpPr>
-          <p:cNvPr id="3" name="TextBox 2"/>
+              <a:t>海洋墨水會乾</a:t>
+            </a:r>
+          </a:p>
+        </p:txBody>
+      </p:sp>
+      <p:sp>
+        <p:nvSpPr>
+          <p:cNvPr id="3" name="TextBox 2">
+            <a:extLst>
+              <a:ext uri="{FF2B5EF4-FFF2-40B4-BE49-F238E27FC236}">
+                <a16:creationId xmlns:a16="http://schemas.microsoft.com/office/drawing/2014/main" id="{25BB73A7-1ABE-755D-3558-4512017A3BB4}"/>
+              </a:ext>
+            </a:extLst>
+          </p:cNvPr>
           <p:cNvSpPr txBox="1"/>
           <p:nvPr/>
         </p:nvSpPr>
         <p:spPr>
           <a:xfrm>
-            <a:off x="1115616" y="1275606"/>
-            <a:ext cx="720080" cy="769441"/>
+            <a:off x="0" y="3795887"/>
+            <a:ext cx="9144000" cy="523220"/>
           </a:xfrm>
           <a:prstGeom prst="rect">
             <a:avLst/>
@@ -3264,15 +3323,16 @@
           </a:bodyPr>
           <a:lstStyle/>
           <a:p>
-            <a:r>
-              <a:rPr lang="en-US" sz="4400" b="1" dirty="0" smtClean="0">
+            <a:pPr algn="ctr"/>
+            <a:r>
+              <a:rPr lang="en-US" sz="2800" b="1" dirty="0">
                 <a:solidFill>
                   <a:srgbClr val="000066"/>
                 </a:solidFill>
               </a:rPr>
-              <a:t>1.</a:t>
-            </a:r>
-            <a:endParaRPr lang="en-US" sz="4400" b="1" dirty="0">
+              <a:t>( 2 / 2 )</a:t>
+            </a:r>
+            <a:endParaRPr lang="vi-VN" sz="2800" b="1" dirty="0">
               <a:solidFill>
                 <a:srgbClr val="000066"/>
               </a:solidFill>
@@ -3281,6 +3341,341 @@
         </p:txBody>
       </p:sp>
     </p:spTree>
+    <p:extLst>
+      <p:ext uri="{BB962C8B-B14F-4D97-AF65-F5344CB8AC3E}">
+        <p14:creationId xmlns:p14="http://schemas.microsoft.com/office/powerpoint/2010/main" val="1708661744"/>
+      </p:ext>
+    </p:extLst>
+  </p:cSld>
+  <p:clrMapOvr>
+    <a:masterClrMapping/>
+  </p:clrMapOvr>
+</p:sld>
+</file>
+
+<file path=ppt/slides/slide11.xml><?xml version="1.0" encoding="utf-8"?>
+<p:sld xmlns:a="http://schemas.openxmlformats.org/drawingml/2006/main" xmlns:r="http://schemas.openxmlformats.org/officeDocument/2006/relationships" xmlns:p="http://schemas.openxmlformats.org/presentationml/2006/main">
+  <p:cSld>
+    <p:spTree>
+      <p:nvGrpSpPr>
+        <p:cNvPr id="1" name="">
+          <a:extLst>
+            <a:ext uri="{FF2B5EF4-FFF2-40B4-BE49-F238E27FC236}">
+              <a16:creationId xmlns:a16="http://schemas.microsoft.com/office/drawing/2014/main" id="{CC7693FD-C5A6-205D-6B95-5D1C4518F5DE}"/>
+            </a:ext>
+          </a:extLst>
+        </p:cNvPr>
+        <p:cNvGrpSpPr/>
+        <p:nvPr/>
+      </p:nvGrpSpPr>
+      <p:grpSpPr>
+        <a:xfrm>
+          <a:off x="0" y="0"/>
+          <a:ext cx="0" cy="0"/>
+          <a:chOff x="0" y="0"/>
+          <a:chExt cx="0" cy="0"/>
+        </a:xfrm>
+      </p:grpSpPr>
+      <p:sp>
+        <p:nvSpPr>
+          <p:cNvPr id="5" name="內容版面配置區 4">
+            <a:extLst>
+              <a:ext uri="{FF2B5EF4-FFF2-40B4-BE49-F238E27FC236}">
+                <a16:creationId xmlns:a16="http://schemas.microsoft.com/office/drawing/2014/main" id="{D41B4D87-485F-96A1-C722-D82A8DF2D3AE}"/>
+              </a:ext>
+            </a:extLst>
+          </p:cNvPr>
+          <p:cNvSpPr>
+            <a:spLocks noGrp="1"/>
+          </p:cNvSpPr>
+          <p:nvPr>
+            <p:ph idx="1"/>
+          </p:nvPr>
+        </p:nvSpPr>
+        <p:spPr>
+          <a:xfrm>
+            <a:off x="0" y="1563639"/>
+            <a:ext cx="9144000" cy="1803647"/>
+          </a:xfrm>
+        </p:spPr>
+        <p:txBody>
+          <a:bodyPr anchor="ctr">
+            <a:normAutofit/>
+          </a:bodyPr>
+          <a:lstStyle/>
+          <a:p>
+            <a:pPr marL="0" indent="0" algn="ctr">
+              <a:buNone/>
+            </a:pPr>
+            <a:r>
+              <a:rPr lang="zh-TW" altLang="en-US" sz="4800" b="1" dirty="0">
+                <a:solidFill>
+                  <a:srgbClr val="000066"/>
+                </a:solidFill>
+                <a:latin typeface="Microsoft JhengHei" pitchFamily="34" charset="-120"/>
+                <a:ea typeface="Microsoft JhengHei" pitchFamily="34" charset="-120"/>
+              </a:rPr>
+              <a:t>案件雖長  如天連天</a:t>
+            </a:r>
+          </a:p>
+          <a:p>
+            <a:pPr marL="0" indent="0" algn="ctr">
+              <a:buNone/>
+            </a:pPr>
+            <a:r>
+              <a:rPr lang="zh-TW" altLang="en-US" sz="4800" b="1" dirty="0">
+                <a:solidFill>
+                  <a:srgbClr val="000066"/>
+                </a:solidFill>
+                <a:latin typeface="Microsoft JhengHei" pitchFamily="34" charset="-120"/>
+                <a:ea typeface="Microsoft JhengHei" pitchFamily="34" charset="-120"/>
+              </a:rPr>
+              <a:t>仍難表達透暢</a:t>
+            </a:r>
+          </a:p>
+        </p:txBody>
+      </p:sp>
+      <p:sp>
+        <p:nvSpPr>
+          <p:cNvPr id="3" name="TextBox 2">
+            <a:extLst>
+              <a:ext uri="{FF2B5EF4-FFF2-40B4-BE49-F238E27FC236}">
+                <a16:creationId xmlns:a16="http://schemas.microsoft.com/office/drawing/2014/main" id="{10AA55A5-A492-4B41-7B33-1A5C3B014455}"/>
+              </a:ext>
+            </a:extLst>
+          </p:cNvPr>
+          <p:cNvSpPr txBox="1"/>
+          <p:nvPr/>
+        </p:nvSpPr>
+        <p:spPr>
+          <a:xfrm>
+            <a:off x="0" y="3795887"/>
+            <a:ext cx="9144000" cy="523220"/>
+          </a:xfrm>
+          <a:prstGeom prst="rect">
+            <a:avLst/>
+          </a:prstGeom>
+          <a:noFill/>
+        </p:spPr>
+        <p:txBody>
+          <a:bodyPr wrap="square" rtlCol="0">
+            <a:spAutoFit/>
+          </a:bodyPr>
+          <a:lstStyle/>
+          <a:p>
+            <a:pPr algn="ctr"/>
+            <a:r>
+              <a:rPr lang="en-US" sz="2800" b="1" dirty="0">
+                <a:solidFill>
+                  <a:srgbClr val="000066"/>
+                </a:solidFill>
+              </a:rPr>
+              <a:t>( 2 / 2 )</a:t>
+            </a:r>
+            <a:endParaRPr lang="vi-VN" sz="2800" b="1" dirty="0">
+              <a:solidFill>
+                <a:srgbClr val="000066"/>
+              </a:solidFill>
+            </a:endParaRPr>
+          </a:p>
+        </p:txBody>
+      </p:sp>
+    </p:spTree>
+    <p:extLst>
+      <p:ext uri="{BB962C8B-B14F-4D97-AF65-F5344CB8AC3E}">
+        <p14:creationId xmlns:p14="http://schemas.microsoft.com/office/powerpoint/2010/main" val="2331802109"/>
+      </p:ext>
+    </p:extLst>
+  </p:cSld>
+  <p:clrMapOvr>
+    <a:masterClrMapping/>
+  </p:clrMapOvr>
+</p:sld>
+</file>
+
+<file path=ppt/slides/slide12.xml><?xml version="1.0" encoding="utf-8"?>
+<p:sld xmlns:a="http://schemas.openxmlformats.org/drawingml/2006/main" xmlns:r="http://schemas.openxmlformats.org/officeDocument/2006/relationships" xmlns:p="http://schemas.openxmlformats.org/presentationml/2006/main">
+  <p:cSld>
+    <p:spTree>
+      <p:nvGrpSpPr>
+        <p:cNvPr id="1" name="">
+          <a:extLst>
+            <a:ext uri="{FF2B5EF4-FFF2-40B4-BE49-F238E27FC236}">
+              <a16:creationId xmlns:a16="http://schemas.microsoft.com/office/drawing/2014/main" id="{73FA3C87-0862-C01E-53E5-15997BEF0E21}"/>
+            </a:ext>
+          </a:extLst>
+        </p:cNvPr>
+        <p:cNvGrpSpPr/>
+        <p:nvPr/>
+      </p:nvGrpSpPr>
+      <p:grpSpPr>
+        <a:xfrm>
+          <a:off x="0" y="0"/>
+          <a:ext cx="0" cy="0"/>
+          <a:chOff x="0" y="0"/>
+          <a:chExt cx="0" cy="0"/>
+        </a:xfrm>
+      </p:grpSpPr>
+      <p:sp>
+        <p:nvSpPr>
+          <p:cNvPr id="5" name="內容版面配置區 4">
+            <a:extLst>
+              <a:ext uri="{FF2B5EF4-FFF2-40B4-BE49-F238E27FC236}">
+                <a16:creationId xmlns:a16="http://schemas.microsoft.com/office/drawing/2014/main" id="{0C303802-8474-D05E-C014-EC07EF6CD9D2}"/>
+              </a:ext>
+            </a:extLst>
+          </p:cNvPr>
+          <p:cNvSpPr>
+            <a:spLocks noGrp="1"/>
+          </p:cNvSpPr>
+          <p:nvPr>
+            <p:ph idx="1"/>
+          </p:nvPr>
+        </p:nvSpPr>
+        <p:spPr>
+          <a:xfrm>
+            <a:off x="0" y="1563639"/>
+            <a:ext cx="9144000" cy="1803647"/>
+          </a:xfrm>
+        </p:spPr>
+        <p:txBody>
+          <a:bodyPr anchor="ctr">
+            <a:normAutofit/>
+          </a:bodyPr>
+          <a:lstStyle/>
+          <a:p>
+            <a:pPr marL="0" indent="0" algn="ctr">
+              <a:buNone/>
+            </a:pPr>
+            <a:r>
+              <a:rPr lang="zh-TW" altLang="en-US" sz="4800" b="1" dirty="0">
+                <a:solidFill>
+                  <a:srgbClr val="000066"/>
+                </a:solidFill>
+                <a:latin typeface="Microsoft JhengHei" pitchFamily="34" charset="-120"/>
+                <a:ea typeface="Microsoft JhengHei" pitchFamily="34" charset="-120"/>
+              </a:rPr>
+              <a:t>阿神之愛  何等豐富</a:t>
+            </a:r>
+          </a:p>
+          <a:p>
+            <a:pPr marL="0" indent="0" algn="ctr">
+              <a:buNone/>
+            </a:pPr>
+            <a:r>
+              <a:rPr lang="zh-TW" altLang="en-US" sz="4800" b="1" dirty="0">
+                <a:solidFill>
+                  <a:srgbClr val="000066"/>
+                </a:solidFill>
+                <a:latin typeface="Microsoft JhengHei" pitchFamily="34" charset="-120"/>
+                <a:ea typeface="Microsoft JhengHei" pitchFamily="34" charset="-120"/>
+              </a:rPr>
+              <a:t>偉大無限無量</a:t>
+            </a:r>
+          </a:p>
+        </p:txBody>
+      </p:sp>
+    </p:spTree>
+    <p:extLst>
+      <p:ext uri="{BB962C8B-B14F-4D97-AF65-F5344CB8AC3E}">
+        <p14:creationId xmlns:p14="http://schemas.microsoft.com/office/powerpoint/2010/main" val="3664972825"/>
+      </p:ext>
+    </p:extLst>
+  </p:cSld>
+  <p:clrMapOvr>
+    <a:masterClrMapping/>
+  </p:clrMapOvr>
+</p:sld>
+</file>
+
+<file path=ppt/slides/slide13.xml><?xml version="1.0" encoding="utf-8"?>
+<p:sld xmlns:a="http://schemas.openxmlformats.org/drawingml/2006/main" xmlns:r="http://schemas.openxmlformats.org/officeDocument/2006/relationships" xmlns:p="http://schemas.openxmlformats.org/presentationml/2006/main">
+  <p:cSld>
+    <p:spTree>
+      <p:nvGrpSpPr>
+        <p:cNvPr id="1" name="">
+          <a:extLst>
+            <a:ext uri="{FF2B5EF4-FFF2-40B4-BE49-F238E27FC236}">
+              <a16:creationId xmlns:a16="http://schemas.microsoft.com/office/drawing/2014/main" id="{1E09F3CD-88A5-5E06-2CC3-F5F7D5FE9BAF}"/>
+            </a:ext>
+          </a:extLst>
+        </p:cNvPr>
+        <p:cNvGrpSpPr/>
+        <p:nvPr/>
+      </p:nvGrpSpPr>
+      <p:grpSpPr>
+        <a:xfrm>
+          <a:off x="0" y="0"/>
+          <a:ext cx="0" cy="0"/>
+          <a:chOff x="0" y="0"/>
+          <a:chExt cx="0" cy="0"/>
+        </a:xfrm>
+      </p:grpSpPr>
+      <p:sp>
+        <p:nvSpPr>
+          <p:cNvPr id="5" name="內容版面配置區 4">
+            <a:extLst>
+              <a:ext uri="{FF2B5EF4-FFF2-40B4-BE49-F238E27FC236}">
+                <a16:creationId xmlns:a16="http://schemas.microsoft.com/office/drawing/2014/main" id="{C267D17A-1F81-2A5F-FADF-2C1DB1C9B729}"/>
+              </a:ext>
+            </a:extLst>
+          </p:cNvPr>
+          <p:cNvSpPr>
+            <a:spLocks noGrp="1"/>
+          </p:cNvSpPr>
+          <p:nvPr>
+            <p:ph idx="1"/>
+          </p:nvPr>
+        </p:nvSpPr>
+        <p:spPr>
+          <a:xfrm>
+            <a:off x="0" y="1563639"/>
+            <a:ext cx="9144000" cy="1803647"/>
+          </a:xfrm>
+        </p:spPr>
+        <p:txBody>
+          <a:bodyPr anchor="ctr">
+            <a:normAutofit/>
+          </a:bodyPr>
+          <a:lstStyle/>
+          <a:p>
+            <a:pPr marL="0" indent="0" algn="ctr">
+              <a:buNone/>
+            </a:pPr>
+            <a:r>
+              <a:rPr lang="zh-TW" altLang="en-US" sz="4800" b="1" dirty="0">
+                <a:solidFill>
+                  <a:srgbClr val="000066"/>
+                </a:solidFill>
+                <a:latin typeface="Microsoft JhengHei" pitchFamily="34" charset="-120"/>
+                <a:ea typeface="Microsoft JhengHei" pitchFamily="34" charset="-120"/>
+              </a:rPr>
+              <a:t>永遠堅定  永遠不變</a:t>
+            </a:r>
+          </a:p>
+          <a:p>
+            <a:pPr marL="0" indent="0" algn="ctr">
+              <a:buNone/>
+            </a:pPr>
+            <a:r>
+              <a:rPr lang="zh-TW" altLang="en-US" sz="4800" b="1" dirty="0">
+                <a:solidFill>
+                  <a:srgbClr val="000066"/>
+                </a:solidFill>
+                <a:latin typeface="Microsoft JhengHei" pitchFamily="34" charset="-120"/>
+                <a:ea typeface="Microsoft JhengHei" pitchFamily="34" charset="-120"/>
+              </a:rPr>
+              <a:t>天使聖徒頌揚</a:t>
+            </a:r>
+          </a:p>
+        </p:txBody>
+      </p:sp>
+    </p:spTree>
+    <p:extLst>
+      <p:ext uri="{BB962C8B-B14F-4D97-AF65-F5344CB8AC3E}">
+        <p14:creationId xmlns:p14="http://schemas.microsoft.com/office/powerpoint/2010/main" val="889020391"/>
+      </p:ext>
+    </p:extLst>
   </p:cSld>
   <p:clrMapOvr>
     <a:masterClrMapping/>
@@ -3307,157 +3702,67 @@
       </p:grpSpPr>
       <p:sp>
         <p:nvSpPr>
-          <p:cNvPr id="2" name="標題 1"/>
-          <p:cNvSpPr>
-            <a:spLocks noGrp="1"/>
-          </p:cNvSpPr>
-          <p:nvPr>
-            <p:ph type="title"/>
-          </p:nvPr>
-        </p:nvSpPr>
-        <p:spPr/>
-        <p:txBody>
-          <a:bodyPr>
+          <p:cNvPr id="5" name="內容版面配置區 4"/>
+          <p:cNvSpPr>
+            <a:spLocks noGrp="1"/>
+          </p:cNvSpPr>
+          <p:nvPr>
+            <p:ph idx="1"/>
+          </p:nvPr>
+        </p:nvSpPr>
+        <p:spPr>
+          <a:xfrm>
+            <a:off x="0" y="1563639"/>
+            <a:ext cx="9144000" cy="1803647"/>
+          </a:xfrm>
+        </p:spPr>
+        <p:txBody>
+          <a:bodyPr anchor="ctr">
             <a:normAutofit/>
           </a:bodyPr>
           <a:lstStyle/>
           <a:p>
-            <a:r>
-              <a:rPr lang="zh-CN" altLang="en-US" sz="4000" b="1" dirty="0">
+            <a:pPr marL="0" indent="0" algn="ctr">
+              <a:buNone/>
+            </a:pPr>
+            <a:r>
+              <a:rPr lang="zh-TW" altLang="en-US" sz="4800" b="1" dirty="0">
                 <a:solidFill>
                   <a:srgbClr val="000066"/>
                 </a:solidFill>
-                <a:latin typeface="微軟正黑體" pitchFamily="34" charset="-120"/>
-                <a:ea typeface="微軟正黑體" pitchFamily="34" charset="-120"/>
+                <a:latin typeface="Microsoft JhengHei" pitchFamily="34" charset="-120"/>
+                <a:ea typeface="Microsoft JhengHei" pitchFamily="34" charset="-120"/>
               </a:rPr>
-              <a:t>真神之愛</a:t>
-            </a:r>
-            <a:endParaRPr lang="zh-TW" altLang="en-US" sz="4000" b="1" dirty="0">
-              <a:solidFill>
-                <a:srgbClr val="000066"/>
-              </a:solidFill>
-              <a:latin typeface="微軟正黑體" pitchFamily="34" charset="-120"/>
-              <a:ea typeface="微軟正黑體" pitchFamily="34" charset="-120"/>
-            </a:endParaRPr>
-          </a:p>
-        </p:txBody>
-      </p:sp>
-      <p:sp>
-        <p:nvSpPr>
-          <p:cNvPr id="4" name="內容版面配置區 3"/>
-          <p:cNvSpPr>
-            <a:spLocks noGrp="1"/>
-          </p:cNvSpPr>
-          <p:nvPr>
-            <p:ph idx="1"/>
-          </p:nvPr>
-        </p:nvSpPr>
-        <p:spPr/>
-        <p:txBody>
-          <a:bodyPr>
-            <a:noAutofit/>
-          </a:bodyPr>
-          <a:lstStyle/>
-          <a:p>
-            <a:pPr algn="ctr">
+              <a:t>真神之愛  偉大無窮</a:t>
+            </a:r>
+          </a:p>
+          <a:p>
+            <a:pPr marL="0" indent="0" algn="ctr">
               <a:buNone/>
             </a:pPr>
             <a:r>
-              <a:rPr lang="zh-CN" altLang="en-US" sz="4800" b="1" dirty="0">
+              <a:rPr lang="zh-TW" altLang="en-US" sz="4800" b="1" dirty="0">
                 <a:solidFill>
                   <a:srgbClr val="000066"/>
                 </a:solidFill>
-                <a:latin typeface="微軟正黑體" pitchFamily="34" charset="-120"/>
-                <a:ea typeface="微軟正黑體" pitchFamily="34" charset="-120"/>
+                <a:latin typeface="Microsoft JhengHei" pitchFamily="34" charset="-120"/>
+                <a:ea typeface="Microsoft JhengHei" pitchFamily="34" charset="-120"/>
               </a:rPr>
-              <a:t>始祖犯罪 墮入引誘</a:t>
-            </a:r>
-            <a:endParaRPr lang="en-US" altLang="zh-CN" sz="4800" b="1" dirty="0">
-              <a:solidFill>
-                <a:srgbClr val="000066"/>
-              </a:solidFill>
-              <a:latin typeface="微軟正黑體" pitchFamily="34" charset="-120"/>
-              <a:ea typeface="微軟正黑體" pitchFamily="34" charset="-120"/>
-            </a:endParaRPr>
-          </a:p>
-          <a:p>
-            <a:pPr algn="ctr">
-              <a:buNone/>
-            </a:pPr>
-            <a:r>
-              <a:rPr lang="zh-CN" altLang="en-US" sz="4800" b="1" dirty="0">
-                <a:solidFill>
-                  <a:srgbClr val="000066"/>
-                </a:solidFill>
-                <a:latin typeface="微軟正黑體" pitchFamily="34" charset="-120"/>
-                <a:ea typeface="微軟正黑體" pitchFamily="34" charset="-120"/>
-              </a:rPr>
-              <a:t>神遣愛子拯救</a:t>
-            </a:r>
-            <a:endParaRPr lang="en-US" altLang="zh-CN" sz="4800" b="1" dirty="0">
-              <a:solidFill>
-                <a:srgbClr val="000066"/>
-              </a:solidFill>
-              <a:latin typeface="微軟正黑體" pitchFamily="34" charset="-120"/>
-              <a:ea typeface="微軟正黑體" pitchFamily="34" charset="-120"/>
-            </a:endParaRPr>
-          </a:p>
-          <a:p>
-            <a:pPr algn="ctr">
-              <a:buNone/>
-            </a:pPr>
-            <a:r>
-              <a:rPr lang="zh-CN" altLang="en-US" sz="4800" b="1" dirty="0">
-                <a:solidFill>
-                  <a:srgbClr val="000066"/>
-                </a:solidFill>
-                <a:latin typeface="微軟正黑體" pitchFamily="34" charset="-120"/>
-                <a:ea typeface="微軟正黑體" pitchFamily="34" charset="-120"/>
-              </a:rPr>
-              <a:t>使我罪人 與神和好</a:t>
-            </a:r>
-            <a:endParaRPr lang="en-US" altLang="zh-CN" sz="4800" b="1" dirty="0">
-              <a:solidFill>
-                <a:srgbClr val="000066"/>
-              </a:solidFill>
-              <a:latin typeface="微軟正黑體" pitchFamily="34" charset="-120"/>
-              <a:ea typeface="微軟正黑體" pitchFamily="34" charset="-120"/>
-            </a:endParaRPr>
-          </a:p>
-          <a:p>
-            <a:pPr algn="ctr">
-              <a:buNone/>
-            </a:pPr>
-            <a:r>
-              <a:rPr lang="zh-CN" altLang="en-US" sz="4800" b="1" dirty="0">
-                <a:solidFill>
-                  <a:srgbClr val="000066"/>
-                </a:solidFill>
-                <a:latin typeface="微軟正黑體" pitchFamily="34" charset="-120"/>
-                <a:ea typeface="微軟正黑體" pitchFamily="34" charset="-120"/>
-              </a:rPr>
-              <a:t>赦免一切罪尤</a:t>
-            </a:r>
-            <a:endParaRPr lang="zh-TW" altLang="en-US" sz="4800" b="1" dirty="0">
-              <a:solidFill>
-                <a:srgbClr val="000066"/>
-              </a:solidFill>
-              <a:latin typeface="微軟正黑體" pitchFamily="34" charset="-120"/>
-              <a:ea typeface="微軟正黑體" pitchFamily="34" charset="-120"/>
-            </a:endParaRPr>
-          </a:p>
-        </p:txBody>
-      </p:sp>
-      <p:sp>
-        <p:nvSpPr>
-          <p:cNvPr id="5" name="TextBox 4"/>
+              <a:t>口舌筆墨  難以形容</a:t>
+            </a:r>
+          </a:p>
+        </p:txBody>
+      </p:sp>
+      <p:sp>
+        <p:nvSpPr>
+          <p:cNvPr id="3" name="TextBox 2"/>
           <p:cNvSpPr txBox="1"/>
           <p:nvPr/>
         </p:nvSpPr>
         <p:spPr>
           <a:xfrm>
-            <a:off x="1115616" y="1275606"/>
-            <a:ext cx="720080" cy="769441"/>
+            <a:off x="0" y="3795887"/>
+            <a:ext cx="9144000" cy="523220"/>
           </a:xfrm>
           <a:prstGeom prst="rect">
             <a:avLst/>
@@ -3470,15 +3775,16 @@
           </a:bodyPr>
           <a:lstStyle/>
           <a:p>
-            <a:r>
-              <a:rPr lang="en-US" sz="4400" b="1" dirty="0" smtClean="0">
+            <a:pPr algn="ctr"/>
+            <a:r>
+              <a:rPr lang="en-US" sz="2800" b="1" dirty="0">
                 <a:solidFill>
                   <a:srgbClr val="000066"/>
                 </a:solidFill>
               </a:rPr>
-              <a:t>1.</a:t>
-            </a:r>
-            <a:endParaRPr lang="en-US" sz="4400" b="1" dirty="0">
+              <a:t>( 1 / 2 )</a:t>
+            </a:r>
+            <a:endParaRPr lang="vi-VN" sz="2800" b="1" dirty="0">
               <a:solidFill>
                 <a:srgbClr val="000066"/>
               </a:solidFill>
@@ -3487,6 +3793,11 @@
         </p:txBody>
       </p:sp>
     </p:spTree>
+    <p:extLst>
+      <p:ext uri="{BB962C8B-B14F-4D97-AF65-F5344CB8AC3E}">
+        <p14:creationId xmlns:p14="http://schemas.microsoft.com/office/powerpoint/2010/main" val="1407003638"/>
+      </p:ext>
+    </p:extLst>
   </p:cSld>
   <p:clrMapOvr>
     <a:masterClrMapping/>
@@ -3499,7 +3810,13 @@
   <p:cSld>
     <p:spTree>
       <p:nvGrpSpPr>
-        <p:cNvPr id="1" name=""/>
+        <p:cNvPr id="1" name="">
+          <a:extLst>
+            <a:ext uri="{FF2B5EF4-FFF2-40B4-BE49-F238E27FC236}">
+              <a16:creationId xmlns:a16="http://schemas.microsoft.com/office/drawing/2014/main" id="{73CE0F90-30AB-04C9-4710-1501D8158A76}"/>
+            </a:ext>
+          </a:extLst>
+        </p:cNvPr>
         <p:cNvGrpSpPr/>
         <p:nvPr/>
       </p:nvGrpSpPr>
@@ -3513,148 +3830,114 @@
       </p:grpSpPr>
       <p:sp>
         <p:nvSpPr>
-          <p:cNvPr id="2" name="標題 1"/>
-          <p:cNvSpPr>
-            <a:spLocks noGrp="1"/>
-          </p:cNvSpPr>
-          <p:nvPr>
-            <p:ph type="title"/>
-          </p:nvPr>
-        </p:nvSpPr>
-        <p:spPr/>
-        <p:txBody>
-          <a:bodyPr>
+          <p:cNvPr id="5" name="內容版面配置區 4">
+            <a:extLst>
+              <a:ext uri="{FF2B5EF4-FFF2-40B4-BE49-F238E27FC236}">
+                <a16:creationId xmlns:a16="http://schemas.microsoft.com/office/drawing/2014/main" id="{A5660A56-6E28-538F-B400-0DB5CD0E681D}"/>
+              </a:ext>
+            </a:extLst>
+          </p:cNvPr>
+          <p:cNvSpPr>
+            <a:spLocks noGrp="1"/>
+          </p:cNvSpPr>
+          <p:nvPr>
+            <p:ph idx="1"/>
+          </p:nvPr>
+        </p:nvSpPr>
+        <p:spPr>
+          <a:xfrm>
+            <a:off x="0" y="1563639"/>
+            <a:ext cx="9144000" cy="1803647"/>
+          </a:xfrm>
+        </p:spPr>
+        <p:txBody>
+          <a:bodyPr anchor="ctr">
             <a:normAutofit/>
           </a:bodyPr>
           <a:lstStyle/>
           <a:p>
-            <a:r>
-              <a:rPr lang="zh-CN" altLang="en-US" sz="4000" b="1" dirty="0">
+            <a:pPr marL="0" indent="0" algn="ctr">
+              <a:buNone/>
+            </a:pPr>
+            <a:r>
+              <a:rPr lang="zh-TW" altLang="en-US" sz="4800" b="1" dirty="0">
                 <a:solidFill>
                   <a:srgbClr val="000066"/>
                 </a:solidFill>
-                <a:latin typeface="微軟正黑體" pitchFamily="34" charset="-120"/>
-                <a:ea typeface="微軟正黑體" pitchFamily="34" charset="-120"/>
+                <a:latin typeface="Microsoft JhengHei" pitchFamily="34" charset="-120"/>
+                <a:ea typeface="Microsoft JhengHei" pitchFamily="34" charset="-120"/>
               </a:rPr>
-              <a:t>真神之愛</a:t>
-            </a:r>
-            <a:endParaRPr lang="zh-TW" altLang="en-US" sz="4000" b="1" dirty="0">
+              <a:t>高超諸星  深達地獄</a:t>
+            </a:r>
+          </a:p>
+          <a:p>
+            <a:pPr marL="0" indent="0" algn="ctr">
+              <a:buNone/>
+            </a:pPr>
+            <a:r>
+              <a:rPr lang="zh-TW" altLang="en-US" sz="4800" b="1" dirty="0">
+                <a:solidFill>
+                  <a:srgbClr val="000066"/>
+                </a:solidFill>
+                <a:latin typeface="Microsoft JhengHei" pitchFamily="34" charset="-120"/>
+                <a:ea typeface="Microsoft JhengHei" pitchFamily="34" charset="-120"/>
+              </a:rPr>
+              <a:t>長闊高深  世無相同</a:t>
+            </a:r>
+          </a:p>
+        </p:txBody>
+      </p:sp>
+      <p:sp>
+        <p:nvSpPr>
+          <p:cNvPr id="3" name="TextBox 2">
+            <a:extLst>
+              <a:ext uri="{FF2B5EF4-FFF2-40B4-BE49-F238E27FC236}">
+                <a16:creationId xmlns:a16="http://schemas.microsoft.com/office/drawing/2014/main" id="{CD7E0205-B3D4-D9AD-067F-17C04E7F5632}"/>
+              </a:ext>
+            </a:extLst>
+          </p:cNvPr>
+          <p:cNvSpPr txBox="1"/>
+          <p:nvPr/>
+        </p:nvSpPr>
+        <p:spPr>
+          <a:xfrm>
+            <a:off x="0" y="3795887"/>
+            <a:ext cx="9144000" cy="523220"/>
+          </a:xfrm>
+          <a:prstGeom prst="rect">
+            <a:avLst/>
+          </a:prstGeom>
+          <a:noFill/>
+        </p:spPr>
+        <p:txBody>
+          <a:bodyPr wrap="square" rtlCol="0">
+            <a:spAutoFit/>
+          </a:bodyPr>
+          <a:lstStyle/>
+          <a:p>
+            <a:pPr algn="ctr"/>
+            <a:r>
+              <a:rPr lang="en-US" sz="2800" b="1" dirty="0">
+                <a:solidFill>
+                  <a:srgbClr val="000066"/>
+                </a:solidFill>
+              </a:rPr>
+              <a:t>( 1 / 2 )</a:t>
+            </a:r>
+            <a:endParaRPr lang="vi-VN" sz="2800" b="1" dirty="0">
               <a:solidFill>
                 <a:srgbClr val="000066"/>
               </a:solidFill>
-              <a:latin typeface="微軟正黑體" pitchFamily="34" charset="-120"/>
-              <a:ea typeface="微軟正黑體" pitchFamily="34" charset="-120"/>
             </a:endParaRPr>
           </a:p>
         </p:txBody>
       </p:sp>
-      <p:sp>
-        <p:nvSpPr>
-          <p:cNvPr id="4" name="內容版面配置區 3"/>
-          <p:cNvSpPr>
-            <a:spLocks noGrp="1"/>
-          </p:cNvSpPr>
-          <p:nvPr>
-            <p:ph idx="1"/>
-          </p:nvPr>
-        </p:nvSpPr>
-        <p:spPr/>
-        <p:txBody>
-          <a:bodyPr>
-            <a:noAutofit/>
-          </a:bodyPr>
-          <a:lstStyle/>
-          <a:p>
-            <a:pPr algn="ctr">
-              <a:buNone/>
-            </a:pPr>
-            <a:r>
-              <a:rPr lang="zh-CN" altLang="en-US" sz="4800" b="1" dirty="0">
-                <a:solidFill>
-                  <a:srgbClr val="000066"/>
-                </a:solidFill>
-                <a:latin typeface="微軟正黑體" pitchFamily="34" charset="-120"/>
-                <a:ea typeface="微軟正黑體" pitchFamily="34" charset="-120"/>
-              </a:rPr>
-              <a:t>阿神之愛 何等豐富</a:t>
-            </a:r>
-            <a:endParaRPr lang="en-US" altLang="zh-CN" sz="4800" b="1" dirty="0">
-              <a:solidFill>
-                <a:srgbClr val="000066"/>
-              </a:solidFill>
-              <a:latin typeface="微軟正黑體" pitchFamily="34" charset="-120"/>
-              <a:ea typeface="微軟正黑體" pitchFamily="34" charset="-120"/>
-            </a:endParaRPr>
-          </a:p>
-          <a:p>
-            <a:pPr algn="ctr">
-              <a:buNone/>
-            </a:pPr>
-            <a:r>
-              <a:rPr lang="zh-CN" altLang="en-US" sz="4800" b="1" dirty="0">
-                <a:solidFill>
-                  <a:srgbClr val="000066"/>
-                </a:solidFill>
-                <a:latin typeface="微軟正黑體" pitchFamily="34" charset="-120"/>
-                <a:ea typeface="微軟正黑體" pitchFamily="34" charset="-120"/>
-              </a:rPr>
-              <a:t>偉大無限無量</a:t>
-            </a:r>
-            <a:endParaRPr lang="en-US" altLang="zh-CN" sz="4800" b="1" dirty="0">
-              <a:solidFill>
-                <a:srgbClr val="000066"/>
-              </a:solidFill>
-              <a:latin typeface="微軟正黑體" pitchFamily="34" charset="-120"/>
-              <a:ea typeface="微軟正黑體" pitchFamily="34" charset="-120"/>
-            </a:endParaRPr>
-          </a:p>
-          <a:p>
-            <a:pPr algn="ctr">
-              <a:buNone/>
-            </a:pPr>
-            <a:r>
-              <a:rPr lang="zh-CN" altLang="en-US" sz="4800" b="1" dirty="0">
-                <a:solidFill>
-                  <a:srgbClr val="000066"/>
-                </a:solidFill>
-                <a:latin typeface="微軟正黑體" pitchFamily="34" charset="-120"/>
-                <a:ea typeface="微軟正黑體" pitchFamily="34" charset="-120"/>
-              </a:rPr>
-              <a:t>永遠堅定 永遠不變</a:t>
-            </a:r>
-            <a:endParaRPr lang="en-US" altLang="zh-CN" sz="4800" b="1" dirty="0">
-              <a:solidFill>
-                <a:srgbClr val="000066"/>
-              </a:solidFill>
-              <a:latin typeface="微軟正黑體" pitchFamily="34" charset="-120"/>
-              <a:ea typeface="微軟正黑體" pitchFamily="34" charset="-120"/>
-            </a:endParaRPr>
-          </a:p>
-          <a:p>
-            <a:pPr algn="ctr">
-              <a:buNone/>
-            </a:pPr>
-            <a:r>
-              <a:rPr lang="zh-CN" altLang="en-US" sz="4800" b="1" dirty="0">
-                <a:solidFill>
-                  <a:srgbClr val="000066"/>
-                </a:solidFill>
-                <a:latin typeface="微軟正黑體" pitchFamily="34" charset="-120"/>
-                <a:ea typeface="微軟正黑體" pitchFamily="34" charset="-120"/>
-              </a:rPr>
-              <a:t>天使聖徒頌揚</a:t>
-            </a:r>
-            <a:endParaRPr lang="zh-TW" altLang="en-US" sz="4800" b="1" dirty="0">
-              <a:solidFill>
-                <a:srgbClr val="000066"/>
-              </a:solidFill>
-              <a:latin typeface="微軟正黑體" pitchFamily="34" charset="-120"/>
-              <a:ea typeface="微軟正黑體" pitchFamily="34" charset="-120"/>
-            </a:endParaRPr>
-          </a:p>
-        </p:txBody>
-      </p:sp>
     </p:spTree>
+    <p:extLst>
+      <p:ext uri="{BB962C8B-B14F-4D97-AF65-F5344CB8AC3E}">
+        <p14:creationId xmlns:p14="http://schemas.microsoft.com/office/powerpoint/2010/main" val="4264710573"/>
+      </p:ext>
+    </p:extLst>
   </p:cSld>
   <p:clrMapOvr>
     <a:masterClrMapping/>
@@ -3667,7 +3950,13 @@
   <p:cSld>
     <p:spTree>
       <p:nvGrpSpPr>
-        <p:cNvPr id="1" name=""/>
+        <p:cNvPr id="1" name="">
+          <a:extLst>
+            <a:ext uri="{FF2B5EF4-FFF2-40B4-BE49-F238E27FC236}">
+              <a16:creationId xmlns:a16="http://schemas.microsoft.com/office/drawing/2014/main" id="{EC9E3E07-6169-72CB-C493-0897DB0F1C9C}"/>
+            </a:ext>
+          </a:extLst>
+        </p:cNvPr>
         <p:cNvGrpSpPr/>
         <p:nvPr/>
       </p:nvGrpSpPr>
@@ -3681,157 +3970,79 @@
       </p:grpSpPr>
       <p:sp>
         <p:nvSpPr>
-          <p:cNvPr id="2" name="標題 1"/>
-          <p:cNvSpPr>
-            <a:spLocks noGrp="1"/>
-          </p:cNvSpPr>
-          <p:nvPr>
-            <p:ph type="title"/>
-          </p:nvPr>
-        </p:nvSpPr>
-        <p:spPr/>
-        <p:txBody>
-          <a:bodyPr>
+          <p:cNvPr id="5" name="內容版面配置區 4">
+            <a:extLst>
+              <a:ext uri="{FF2B5EF4-FFF2-40B4-BE49-F238E27FC236}">
+                <a16:creationId xmlns:a16="http://schemas.microsoft.com/office/drawing/2014/main" id="{2C0B0091-E319-01B4-3A50-07C8BE1B3009}"/>
+              </a:ext>
+            </a:extLst>
+          </p:cNvPr>
+          <p:cNvSpPr>
+            <a:spLocks noGrp="1"/>
+          </p:cNvSpPr>
+          <p:nvPr>
+            <p:ph idx="1"/>
+          </p:nvPr>
+        </p:nvSpPr>
+        <p:spPr>
+          <a:xfrm>
+            <a:off x="0" y="1563639"/>
+            <a:ext cx="9144000" cy="1803647"/>
+          </a:xfrm>
+        </p:spPr>
+        <p:txBody>
+          <a:bodyPr anchor="ctr">
             <a:normAutofit/>
           </a:bodyPr>
           <a:lstStyle/>
           <a:p>
-            <a:r>
-              <a:rPr lang="zh-CN" altLang="en-US" sz="4000" b="1" dirty="0">
+            <a:pPr marL="0" indent="0" algn="ctr">
+              <a:buNone/>
+            </a:pPr>
+            <a:r>
+              <a:rPr lang="zh-TW" altLang="en-US" sz="4800" b="1" dirty="0">
                 <a:solidFill>
                   <a:srgbClr val="000066"/>
                 </a:solidFill>
-                <a:latin typeface="微軟正黑體" pitchFamily="34" charset="-120"/>
-                <a:ea typeface="微軟正黑體" pitchFamily="34" charset="-120"/>
+                <a:latin typeface="Microsoft JhengHei" pitchFamily="34" charset="-120"/>
+                <a:ea typeface="Microsoft JhengHei" pitchFamily="34" charset="-120"/>
               </a:rPr>
-              <a:t>真神之愛</a:t>
-            </a:r>
-            <a:endParaRPr lang="zh-TW" altLang="en-US" sz="4000" b="1" dirty="0">
-              <a:solidFill>
-                <a:srgbClr val="000066"/>
-              </a:solidFill>
-              <a:latin typeface="微軟正黑體" pitchFamily="34" charset="-120"/>
-              <a:ea typeface="微軟正黑體" pitchFamily="34" charset="-120"/>
-            </a:endParaRPr>
-          </a:p>
-        </p:txBody>
-      </p:sp>
-      <p:sp>
-        <p:nvSpPr>
-          <p:cNvPr id="4" name="內容版面配置區 3"/>
-          <p:cNvSpPr>
-            <a:spLocks noGrp="1"/>
-          </p:cNvSpPr>
-          <p:nvPr>
-            <p:ph idx="1"/>
-          </p:nvPr>
-        </p:nvSpPr>
-        <p:spPr/>
-        <p:txBody>
-          <a:bodyPr>
-            <a:noAutofit/>
-          </a:bodyPr>
-          <a:lstStyle/>
-          <a:p>
-            <a:pPr algn="ctr">
+              <a:t>始祖犯罪  墮入引誘</a:t>
+            </a:r>
+          </a:p>
+          <a:p>
+            <a:pPr marL="0" indent="0" algn="ctr">
               <a:buNone/>
             </a:pPr>
             <a:r>
-              <a:rPr lang="zh-CN" altLang="en-US" sz="4800" b="1" dirty="0">
+              <a:rPr lang="zh-TW" altLang="en-US" sz="4800" b="1" dirty="0">
                 <a:solidFill>
                   <a:srgbClr val="000066"/>
                 </a:solidFill>
-                <a:latin typeface="微軟正黑體" pitchFamily="34" charset="-120"/>
-                <a:ea typeface="微軟正黑體" pitchFamily="34" charset="-120"/>
+                <a:latin typeface="Microsoft JhengHei" pitchFamily="34" charset="-120"/>
+                <a:ea typeface="Microsoft JhengHei" pitchFamily="34" charset="-120"/>
               </a:rPr>
-              <a:t>天上諸天 當為紙張</a:t>
-            </a:r>
-            <a:endParaRPr lang="en-US" altLang="zh-CN" sz="4800" b="1" dirty="0">
-              <a:solidFill>
-                <a:srgbClr val="000066"/>
-              </a:solidFill>
-              <a:latin typeface="微軟正黑體" pitchFamily="34" charset="-120"/>
-              <a:ea typeface="微軟正黑體" pitchFamily="34" charset="-120"/>
-            </a:endParaRPr>
-          </a:p>
-          <a:p>
-            <a:pPr algn="ctr">
-              <a:buNone/>
-            </a:pPr>
-            <a:r>
-              <a:rPr lang="zh-CN" altLang="en-US" sz="4800" b="1" dirty="0">
-                <a:solidFill>
-                  <a:srgbClr val="000066"/>
-                </a:solidFill>
-                <a:latin typeface="微軟正黑體" pitchFamily="34" charset="-120"/>
-                <a:ea typeface="微軟正黑體" pitchFamily="34" charset="-120"/>
-              </a:rPr>
-              <a:t>地下萬莖 當為筆桿</a:t>
-            </a:r>
-            <a:endParaRPr lang="en-US" altLang="zh-CN" sz="4800" b="1" dirty="0">
-              <a:solidFill>
-                <a:srgbClr val="000066"/>
-              </a:solidFill>
-              <a:latin typeface="微軟正黑體" pitchFamily="34" charset="-120"/>
-              <a:ea typeface="微軟正黑體" pitchFamily="34" charset="-120"/>
-            </a:endParaRPr>
-          </a:p>
-          <a:p>
-            <a:pPr algn="ctr">
-              <a:buNone/>
-            </a:pPr>
-            <a:r>
-              <a:rPr lang="zh-CN" altLang="en-US" sz="4800" b="1" dirty="0">
-                <a:solidFill>
-                  <a:srgbClr val="000066"/>
-                </a:solidFill>
-                <a:latin typeface="微軟正黑體" pitchFamily="34" charset="-120"/>
-                <a:ea typeface="微軟正黑體" pitchFamily="34" charset="-120"/>
-              </a:rPr>
-              <a:t>世上海洋 當為墨水</a:t>
-            </a:r>
-            <a:endParaRPr lang="en-US" altLang="zh-CN" sz="4800" b="1" dirty="0">
-              <a:solidFill>
-                <a:srgbClr val="000066"/>
-              </a:solidFill>
-              <a:latin typeface="微軟正黑體" pitchFamily="34" charset="-120"/>
-              <a:ea typeface="微軟正黑體" pitchFamily="34" charset="-120"/>
-            </a:endParaRPr>
-          </a:p>
-          <a:p>
-            <a:pPr algn="ctr">
-              <a:buNone/>
-            </a:pPr>
-            <a:r>
-              <a:rPr lang="zh-CN" altLang="en-US" sz="4800" b="1" dirty="0">
-                <a:solidFill>
-                  <a:srgbClr val="000066"/>
-                </a:solidFill>
-                <a:latin typeface="微軟正黑體" pitchFamily="34" charset="-120"/>
-                <a:ea typeface="微軟正黑體" pitchFamily="34" charset="-120"/>
-              </a:rPr>
-              <a:t>全球文人 集合苦幹</a:t>
-            </a:r>
-            <a:endParaRPr lang="zh-TW" altLang="en-US" sz="4800" b="1" dirty="0">
-              <a:solidFill>
-                <a:srgbClr val="000066"/>
-              </a:solidFill>
-              <a:latin typeface="微軟正黑體" pitchFamily="34" charset="-120"/>
-              <a:ea typeface="微軟正黑體" pitchFamily="34" charset="-120"/>
-            </a:endParaRPr>
-          </a:p>
-        </p:txBody>
-      </p:sp>
-      <p:sp>
-        <p:nvSpPr>
-          <p:cNvPr id="5" name="TextBox 4"/>
+              <a:t>神遣愛子拯救</a:t>
+            </a:r>
+          </a:p>
+        </p:txBody>
+      </p:sp>
+      <p:sp>
+        <p:nvSpPr>
+          <p:cNvPr id="3" name="TextBox 2">
+            <a:extLst>
+              <a:ext uri="{FF2B5EF4-FFF2-40B4-BE49-F238E27FC236}">
+                <a16:creationId xmlns:a16="http://schemas.microsoft.com/office/drawing/2014/main" id="{7B4CE49B-E2A4-B439-7354-C4C3248F7806}"/>
+              </a:ext>
+            </a:extLst>
+          </p:cNvPr>
           <p:cNvSpPr txBox="1"/>
           <p:nvPr/>
         </p:nvSpPr>
         <p:spPr>
           <a:xfrm>
-            <a:off x="1115616" y="1275606"/>
-            <a:ext cx="720080" cy="769441"/>
+            <a:off x="0" y="3795887"/>
+            <a:ext cx="9144000" cy="523220"/>
           </a:xfrm>
           <a:prstGeom prst="rect">
             <a:avLst/>
@@ -3844,23 +4055,16 @@
           </a:bodyPr>
           <a:lstStyle/>
           <a:p>
-            <a:r>
-              <a:rPr lang="en-US" sz="4400" b="1" dirty="0">
+            <a:pPr algn="ctr"/>
+            <a:r>
+              <a:rPr lang="en-US" sz="2800" b="1" dirty="0">
                 <a:solidFill>
                   <a:srgbClr val="000066"/>
                 </a:solidFill>
               </a:rPr>
-              <a:t>2</a:t>
-            </a:r>
-            <a:r>
-              <a:rPr lang="en-US" sz="4400" b="1" dirty="0" smtClean="0">
-                <a:solidFill>
-                  <a:srgbClr val="000066"/>
-                </a:solidFill>
-              </a:rPr>
-              <a:t>.</a:t>
-            </a:r>
-            <a:endParaRPr lang="en-US" sz="4400" b="1" dirty="0">
+              <a:t>( 1 / 2 )</a:t>
+            </a:r>
+            <a:endParaRPr lang="vi-VN" sz="2800" b="1" dirty="0">
               <a:solidFill>
                 <a:srgbClr val="000066"/>
               </a:solidFill>
@@ -3869,6 +4073,11 @@
         </p:txBody>
       </p:sp>
     </p:spTree>
+    <p:extLst>
+      <p:ext uri="{BB962C8B-B14F-4D97-AF65-F5344CB8AC3E}">
+        <p14:creationId xmlns:p14="http://schemas.microsoft.com/office/powerpoint/2010/main" val="2693563749"/>
+      </p:ext>
+    </p:extLst>
   </p:cSld>
   <p:clrMapOvr>
     <a:masterClrMapping/>
@@ -3881,7 +4090,13 @@
   <p:cSld>
     <p:spTree>
       <p:nvGrpSpPr>
-        <p:cNvPr id="1" name=""/>
+        <p:cNvPr id="1" name="">
+          <a:extLst>
+            <a:ext uri="{FF2B5EF4-FFF2-40B4-BE49-F238E27FC236}">
+              <a16:creationId xmlns:a16="http://schemas.microsoft.com/office/drawing/2014/main" id="{855FD868-F8E4-EFE2-6F93-99E441DF32F7}"/>
+            </a:ext>
+          </a:extLst>
+        </p:cNvPr>
         <p:cNvGrpSpPr/>
         <p:nvPr/>
       </p:nvGrpSpPr>
@@ -3895,187 +4110,79 @@
       </p:grpSpPr>
       <p:sp>
         <p:nvSpPr>
-          <p:cNvPr id="2" name="標題 1"/>
-          <p:cNvSpPr>
-            <a:spLocks noGrp="1"/>
-          </p:cNvSpPr>
-          <p:nvPr>
-            <p:ph type="title"/>
-          </p:nvPr>
-        </p:nvSpPr>
-        <p:spPr/>
-        <p:txBody>
-          <a:bodyPr>
+          <p:cNvPr id="5" name="內容版面配置區 4">
+            <a:extLst>
+              <a:ext uri="{FF2B5EF4-FFF2-40B4-BE49-F238E27FC236}">
+                <a16:creationId xmlns:a16="http://schemas.microsoft.com/office/drawing/2014/main" id="{850F1D50-08C7-0C1D-1DC1-8D64C90A733F}"/>
+              </a:ext>
+            </a:extLst>
+          </p:cNvPr>
+          <p:cNvSpPr>
+            <a:spLocks noGrp="1"/>
+          </p:cNvSpPr>
+          <p:nvPr>
+            <p:ph idx="1"/>
+          </p:nvPr>
+        </p:nvSpPr>
+        <p:spPr>
+          <a:xfrm>
+            <a:off x="0" y="1563639"/>
+            <a:ext cx="9144000" cy="1803647"/>
+          </a:xfrm>
+        </p:spPr>
+        <p:txBody>
+          <a:bodyPr anchor="ctr">
             <a:normAutofit/>
           </a:bodyPr>
           <a:lstStyle/>
           <a:p>
-            <a:r>
-              <a:rPr lang="zh-CN" altLang="en-US" sz="4000" b="1" dirty="0">
+            <a:pPr marL="0" indent="0" algn="ctr">
+              <a:buNone/>
+            </a:pPr>
+            <a:r>
+              <a:rPr lang="zh-TW" altLang="en-US" sz="4800" b="1" dirty="0">
                 <a:solidFill>
                   <a:srgbClr val="000066"/>
                 </a:solidFill>
-                <a:latin typeface="微軟正黑體" pitchFamily="34" charset="-120"/>
-                <a:ea typeface="微軟正黑體" pitchFamily="34" charset="-120"/>
+                <a:latin typeface="Microsoft JhengHei" pitchFamily="34" charset="-120"/>
+                <a:ea typeface="Microsoft JhengHei" pitchFamily="34" charset="-120"/>
               </a:rPr>
-              <a:t>真神之愛</a:t>
-            </a:r>
-            <a:endParaRPr lang="zh-TW" altLang="en-US" sz="4000" b="1" dirty="0">
-              <a:solidFill>
-                <a:srgbClr val="000066"/>
-              </a:solidFill>
-              <a:latin typeface="微軟正黑體" pitchFamily="34" charset="-120"/>
-              <a:ea typeface="微軟正黑體" pitchFamily="34" charset="-120"/>
-            </a:endParaRPr>
-          </a:p>
-        </p:txBody>
-      </p:sp>
-      <p:sp>
-        <p:nvSpPr>
-          <p:cNvPr id="4" name="內容版面配置區 3"/>
-          <p:cNvSpPr>
-            <a:spLocks noGrp="1"/>
-          </p:cNvSpPr>
-          <p:nvPr>
-            <p:ph idx="1"/>
-          </p:nvPr>
-        </p:nvSpPr>
-        <p:spPr/>
-        <p:txBody>
-          <a:bodyPr>
-            <a:noAutofit/>
-          </a:bodyPr>
-          <a:lstStyle/>
-          <a:p>
-            <a:pPr algn="ctr">
+              <a:t>使我罪人  與神和好</a:t>
+            </a:r>
+          </a:p>
+          <a:p>
+            <a:pPr marL="0" indent="0" algn="ctr">
               <a:buNone/>
             </a:pPr>
             <a:r>
-              <a:rPr lang="zh-CN" altLang="en-US" sz="4800" b="1" dirty="0">
+              <a:rPr lang="zh-TW" altLang="en-US" sz="4800" b="1" dirty="0">
                 <a:solidFill>
                   <a:srgbClr val="000066"/>
                 </a:solidFill>
-                <a:latin typeface="微軟正黑體" pitchFamily="34" charset="-120"/>
-                <a:ea typeface="微軟正黑體" pitchFamily="34" charset="-120"/>
+                <a:latin typeface="Microsoft JhengHei" pitchFamily="34" charset="-120"/>
+                <a:ea typeface="Microsoft JhengHei" pitchFamily="34" charset="-120"/>
               </a:rPr>
-              <a:t>耗盡智力 描寫神愛</a:t>
-            </a:r>
-            <a:endParaRPr lang="en-US" altLang="zh-CN" sz="4800" b="1" dirty="0">
-              <a:solidFill>
-                <a:srgbClr val="000066"/>
-              </a:solidFill>
-              <a:latin typeface="微軟正黑體" pitchFamily="34" charset="-120"/>
-              <a:ea typeface="微軟正黑體" pitchFamily="34" charset="-120"/>
-            </a:endParaRPr>
-          </a:p>
-          <a:p>
-            <a:pPr algn="ctr">
-              <a:buNone/>
-            </a:pPr>
-            <a:r>
-              <a:rPr lang="zh-CN" altLang="en-US" sz="4800" b="1" dirty="0">
-                <a:solidFill>
-                  <a:srgbClr val="000066"/>
-                </a:solidFill>
-                <a:latin typeface="微軟正黑體" pitchFamily="34" charset="-120"/>
-                <a:ea typeface="微軟正黑體" pitchFamily="34" charset="-120"/>
-              </a:rPr>
-              <a:t>海洋墨水會乾</a:t>
-            </a:r>
-            <a:endParaRPr lang="en-US" altLang="zh-CN" sz="4800" b="1" dirty="0">
-              <a:solidFill>
-                <a:srgbClr val="000066"/>
-              </a:solidFill>
-              <a:latin typeface="微軟正黑體" pitchFamily="34" charset="-120"/>
-              <a:ea typeface="微軟正黑體" pitchFamily="34" charset="-120"/>
-            </a:endParaRPr>
-          </a:p>
-          <a:p>
-            <a:pPr algn="ctr">
-              <a:buNone/>
-            </a:pPr>
-            <a:r>
-              <a:rPr lang="zh-CN" altLang="en-US" sz="4800" b="1" dirty="0" smtClean="0">
-                <a:solidFill>
-                  <a:srgbClr val="000066"/>
-                </a:solidFill>
-                <a:latin typeface="微軟正黑體" pitchFamily="34" charset="-120"/>
-                <a:ea typeface="微軟正黑體" pitchFamily="34" charset="-120"/>
-              </a:rPr>
-              <a:t>案</a:t>
-            </a:r>
-            <a:r>
-              <a:rPr lang="zh-TW" altLang="zh-TW" sz="4800" b="1" dirty="0">
-                <a:solidFill>
-                  <a:srgbClr val="000066"/>
-                </a:solidFill>
-                <a:latin typeface="微軟正黑體" pitchFamily="34" charset="-120"/>
-                <a:ea typeface="微軟正黑體" pitchFamily="34" charset="-120"/>
-              </a:rPr>
-              <a:t>卷</a:t>
-            </a:r>
-            <a:r>
-              <a:rPr lang="zh-CN" altLang="en-US" sz="4800" b="1" dirty="0" smtClean="0">
-                <a:solidFill>
-                  <a:srgbClr val="000066"/>
-                </a:solidFill>
-                <a:latin typeface="微軟正黑體" pitchFamily="34" charset="-120"/>
-                <a:ea typeface="微軟正黑體" pitchFamily="34" charset="-120"/>
-              </a:rPr>
-              <a:t>雖</a:t>
-            </a:r>
-            <a:r>
-              <a:rPr lang="zh-CN" altLang="en-US" sz="4800" b="1" dirty="0">
-                <a:solidFill>
-                  <a:srgbClr val="000066"/>
-                </a:solidFill>
-                <a:latin typeface="微軟正黑體" pitchFamily="34" charset="-120"/>
-                <a:ea typeface="微軟正黑體" pitchFamily="34" charset="-120"/>
-              </a:rPr>
-              <a:t>長 如天連天</a:t>
-            </a:r>
-            <a:endParaRPr lang="en-US" altLang="zh-CN" sz="4800" b="1" dirty="0">
-              <a:solidFill>
-                <a:srgbClr val="000066"/>
-              </a:solidFill>
-              <a:latin typeface="微軟正黑體" pitchFamily="34" charset="-120"/>
-              <a:ea typeface="微軟正黑體" pitchFamily="34" charset="-120"/>
-            </a:endParaRPr>
-          </a:p>
-          <a:p>
-            <a:pPr algn="ctr">
-              <a:buNone/>
-            </a:pPr>
-            <a:r>
-              <a:rPr lang="zh-CN" altLang="en-US" sz="4800" b="1" dirty="0">
-                <a:solidFill>
-                  <a:srgbClr val="000066"/>
-                </a:solidFill>
-                <a:latin typeface="微軟正黑體" pitchFamily="34" charset="-120"/>
-                <a:ea typeface="微軟正黑體" pitchFamily="34" charset="-120"/>
-              </a:rPr>
-              <a:t>仍難表達透暢</a:t>
-            </a:r>
-            <a:endParaRPr lang="zh-TW" altLang="en-US" sz="4800" b="1" dirty="0">
-              <a:solidFill>
-                <a:srgbClr val="000066"/>
-              </a:solidFill>
-              <a:latin typeface="微軟正黑體" pitchFamily="34" charset="-120"/>
-              <a:ea typeface="微軟正黑體" pitchFamily="34" charset="-120"/>
-            </a:endParaRPr>
-          </a:p>
-        </p:txBody>
-      </p:sp>
-      <p:sp>
-        <p:nvSpPr>
-          <p:cNvPr id="5" name="TextBox 4"/>
+              <a:t>赦免一切罪尤</a:t>
+            </a:r>
+          </a:p>
+        </p:txBody>
+      </p:sp>
+      <p:sp>
+        <p:nvSpPr>
+          <p:cNvPr id="3" name="TextBox 2">
+            <a:extLst>
+              <a:ext uri="{FF2B5EF4-FFF2-40B4-BE49-F238E27FC236}">
+                <a16:creationId xmlns:a16="http://schemas.microsoft.com/office/drawing/2014/main" id="{F5D5BF44-E83D-3796-7198-101F520B817B}"/>
+              </a:ext>
+            </a:extLst>
+          </p:cNvPr>
           <p:cNvSpPr txBox="1"/>
           <p:nvPr/>
         </p:nvSpPr>
         <p:spPr>
           <a:xfrm>
-            <a:off x="1115616" y="1275606"/>
-            <a:ext cx="720080" cy="769441"/>
+            <a:off x="0" y="3795887"/>
+            <a:ext cx="9144000" cy="523220"/>
           </a:xfrm>
           <a:prstGeom prst="rect">
             <a:avLst/>
@@ -4088,23 +4195,16 @@
           </a:bodyPr>
           <a:lstStyle/>
           <a:p>
-            <a:r>
-              <a:rPr lang="en-US" sz="4400" b="1" dirty="0">
+            <a:pPr algn="ctr"/>
+            <a:r>
+              <a:rPr lang="en-US" sz="2800" b="1" dirty="0">
                 <a:solidFill>
                   <a:srgbClr val="000066"/>
                 </a:solidFill>
               </a:rPr>
-              <a:t>2</a:t>
-            </a:r>
-            <a:r>
-              <a:rPr lang="en-US" sz="4400" b="1" smtClean="0">
-                <a:solidFill>
-                  <a:srgbClr val="000066"/>
-                </a:solidFill>
-              </a:rPr>
-              <a:t>.</a:t>
-            </a:r>
-            <a:endParaRPr lang="en-US" sz="4400" b="1" dirty="0">
+              <a:t>( 1 / 2 )</a:t>
+            </a:r>
+            <a:endParaRPr lang="vi-VN" sz="2800" b="1" dirty="0">
               <a:solidFill>
                 <a:srgbClr val="000066"/>
               </a:solidFill>
@@ -4113,6 +4213,11 @@
         </p:txBody>
       </p:sp>
     </p:spTree>
+    <p:extLst>
+      <p:ext uri="{BB962C8B-B14F-4D97-AF65-F5344CB8AC3E}">
+        <p14:creationId xmlns:p14="http://schemas.microsoft.com/office/powerpoint/2010/main" val="2719523190"/>
+      </p:ext>
+    </p:extLst>
   </p:cSld>
   <p:clrMapOvr>
     <a:masterClrMapping/>
@@ -4125,7 +4230,13 @@
   <p:cSld>
     <p:spTree>
       <p:nvGrpSpPr>
-        <p:cNvPr id="1" name=""/>
+        <p:cNvPr id="1" name="">
+          <a:extLst>
+            <a:ext uri="{FF2B5EF4-FFF2-40B4-BE49-F238E27FC236}">
+              <a16:creationId xmlns:a16="http://schemas.microsoft.com/office/drawing/2014/main" id="{169A3176-7DFB-D387-906B-98DF0E0A0630}"/>
+            </a:ext>
+          </a:extLst>
+        </p:cNvPr>
         <p:cNvGrpSpPr/>
         <p:nvPr/>
       </p:nvGrpSpPr>
@@ -4139,44 +4250,343 @@
       </p:grpSpPr>
       <p:sp>
         <p:nvSpPr>
-          <p:cNvPr id="2" name="標題 1"/>
-          <p:cNvSpPr>
-            <a:spLocks noGrp="1"/>
-          </p:cNvSpPr>
-          <p:nvPr>
-            <p:ph type="title"/>
-          </p:nvPr>
-        </p:nvSpPr>
-        <p:spPr/>
-        <p:txBody>
-          <a:bodyPr>
+          <p:cNvPr id="5" name="內容版面配置區 4">
+            <a:extLst>
+              <a:ext uri="{FF2B5EF4-FFF2-40B4-BE49-F238E27FC236}">
+                <a16:creationId xmlns:a16="http://schemas.microsoft.com/office/drawing/2014/main" id="{BD549E52-E89C-AFCA-5174-7BC0FD4B098B}"/>
+              </a:ext>
+            </a:extLst>
+          </p:cNvPr>
+          <p:cNvSpPr>
+            <a:spLocks noGrp="1"/>
+          </p:cNvSpPr>
+          <p:nvPr>
+            <p:ph idx="1"/>
+          </p:nvPr>
+        </p:nvSpPr>
+        <p:spPr>
+          <a:xfrm>
+            <a:off x="0" y="1563639"/>
+            <a:ext cx="9144000" cy="1803647"/>
+          </a:xfrm>
+        </p:spPr>
+        <p:txBody>
+          <a:bodyPr anchor="ctr">
             <a:normAutofit/>
           </a:bodyPr>
           <a:lstStyle/>
           <a:p>
-            <a:r>
-              <a:rPr lang="zh-CN" altLang="en-US" sz="4000" b="1" dirty="0">
+            <a:pPr marL="0" indent="0" algn="ctr">
+              <a:buNone/>
+            </a:pPr>
+            <a:r>
+              <a:rPr lang="zh-TW" altLang="en-US" sz="4800" b="1" dirty="0">
                 <a:solidFill>
                   <a:srgbClr val="000066"/>
                 </a:solidFill>
-                <a:latin typeface="微軟正黑體" pitchFamily="34" charset="-120"/>
-                <a:ea typeface="微軟正黑體" pitchFamily="34" charset="-120"/>
+                <a:latin typeface="Microsoft JhengHei" pitchFamily="34" charset="-120"/>
+                <a:ea typeface="Microsoft JhengHei" pitchFamily="34" charset="-120"/>
               </a:rPr>
-              <a:t>真神之愛</a:t>
-            </a:r>
-            <a:endParaRPr lang="zh-TW" altLang="en-US" sz="4000" b="1" dirty="0">
+              <a:t>阿神之愛  何等豐富</a:t>
+            </a:r>
+          </a:p>
+          <a:p>
+            <a:pPr marL="0" indent="0" algn="ctr">
+              <a:buNone/>
+            </a:pPr>
+            <a:r>
+              <a:rPr lang="zh-TW" altLang="en-US" sz="4800" b="1" dirty="0">
+                <a:solidFill>
+                  <a:srgbClr val="000066"/>
+                </a:solidFill>
+                <a:latin typeface="Microsoft JhengHei" pitchFamily="34" charset="-120"/>
+                <a:ea typeface="Microsoft JhengHei" pitchFamily="34" charset="-120"/>
+              </a:rPr>
+              <a:t>偉大無限無量</a:t>
+            </a:r>
+          </a:p>
+        </p:txBody>
+      </p:sp>
+    </p:spTree>
+    <p:extLst>
+      <p:ext uri="{BB962C8B-B14F-4D97-AF65-F5344CB8AC3E}">
+        <p14:creationId xmlns:p14="http://schemas.microsoft.com/office/powerpoint/2010/main" val="312316791"/>
+      </p:ext>
+    </p:extLst>
+  </p:cSld>
+  <p:clrMapOvr>
+    <a:masterClrMapping/>
+  </p:clrMapOvr>
+</p:sld>
+</file>
+
+<file path=ppt/slides/slide7.xml><?xml version="1.0" encoding="utf-8"?>
+<p:sld xmlns:a="http://schemas.openxmlformats.org/drawingml/2006/main" xmlns:r="http://schemas.openxmlformats.org/officeDocument/2006/relationships" xmlns:p="http://schemas.openxmlformats.org/presentationml/2006/main">
+  <p:cSld>
+    <p:spTree>
+      <p:nvGrpSpPr>
+        <p:cNvPr id="1" name="">
+          <a:extLst>
+            <a:ext uri="{FF2B5EF4-FFF2-40B4-BE49-F238E27FC236}">
+              <a16:creationId xmlns:a16="http://schemas.microsoft.com/office/drawing/2014/main" id="{2B7818CA-1EC3-31FD-A6EA-8D6D5FF480AE}"/>
+            </a:ext>
+          </a:extLst>
+        </p:cNvPr>
+        <p:cNvGrpSpPr/>
+        <p:nvPr/>
+      </p:nvGrpSpPr>
+      <p:grpSpPr>
+        <a:xfrm>
+          <a:off x="0" y="0"/>
+          <a:ext cx="0" cy="0"/>
+          <a:chOff x="0" y="0"/>
+          <a:chExt cx="0" cy="0"/>
+        </a:xfrm>
+      </p:grpSpPr>
+      <p:sp>
+        <p:nvSpPr>
+          <p:cNvPr id="5" name="內容版面配置區 4">
+            <a:extLst>
+              <a:ext uri="{FF2B5EF4-FFF2-40B4-BE49-F238E27FC236}">
+                <a16:creationId xmlns:a16="http://schemas.microsoft.com/office/drawing/2014/main" id="{A5A0A88D-F8F0-CAF1-CDBC-53F57A3E67AA}"/>
+              </a:ext>
+            </a:extLst>
+          </p:cNvPr>
+          <p:cNvSpPr>
+            <a:spLocks noGrp="1"/>
+          </p:cNvSpPr>
+          <p:nvPr>
+            <p:ph idx="1"/>
+          </p:nvPr>
+        </p:nvSpPr>
+        <p:spPr>
+          <a:xfrm>
+            <a:off x="0" y="1563639"/>
+            <a:ext cx="9144000" cy="1803647"/>
+          </a:xfrm>
+        </p:spPr>
+        <p:txBody>
+          <a:bodyPr anchor="ctr">
+            <a:normAutofit/>
+          </a:bodyPr>
+          <a:lstStyle/>
+          <a:p>
+            <a:pPr marL="0" indent="0" algn="ctr">
+              <a:buNone/>
+            </a:pPr>
+            <a:r>
+              <a:rPr lang="zh-TW" altLang="en-US" sz="4800" b="1" dirty="0">
+                <a:solidFill>
+                  <a:srgbClr val="000066"/>
+                </a:solidFill>
+                <a:latin typeface="Microsoft JhengHei" pitchFamily="34" charset="-120"/>
+                <a:ea typeface="Microsoft JhengHei" pitchFamily="34" charset="-120"/>
+              </a:rPr>
+              <a:t>永遠堅定  永遠不變</a:t>
+            </a:r>
+          </a:p>
+          <a:p>
+            <a:pPr marL="0" indent="0" algn="ctr">
+              <a:buNone/>
+            </a:pPr>
+            <a:r>
+              <a:rPr lang="zh-TW" altLang="en-US" sz="4800" b="1" dirty="0">
+                <a:solidFill>
+                  <a:srgbClr val="000066"/>
+                </a:solidFill>
+                <a:latin typeface="Microsoft JhengHei" pitchFamily="34" charset="-120"/>
+                <a:ea typeface="Microsoft JhengHei" pitchFamily="34" charset="-120"/>
+              </a:rPr>
+              <a:t>天使聖徒頌揚</a:t>
+            </a:r>
+          </a:p>
+        </p:txBody>
+      </p:sp>
+    </p:spTree>
+    <p:extLst>
+      <p:ext uri="{BB962C8B-B14F-4D97-AF65-F5344CB8AC3E}">
+        <p14:creationId xmlns:p14="http://schemas.microsoft.com/office/powerpoint/2010/main" val="128017659"/>
+      </p:ext>
+    </p:extLst>
+  </p:cSld>
+  <p:clrMapOvr>
+    <a:masterClrMapping/>
+  </p:clrMapOvr>
+</p:sld>
+</file>
+
+<file path=ppt/slides/slide8.xml><?xml version="1.0" encoding="utf-8"?>
+<p:sld xmlns:a="http://schemas.openxmlformats.org/drawingml/2006/main" xmlns:r="http://schemas.openxmlformats.org/officeDocument/2006/relationships" xmlns:p="http://schemas.openxmlformats.org/presentationml/2006/main">
+  <p:cSld>
+    <p:spTree>
+      <p:nvGrpSpPr>
+        <p:cNvPr id="1" name="">
+          <a:extLst>
+            <a:ext uri="{FF2B5EF4-FFF2-40B4-BE49-F238E27FC236}">
+              <a16:creationId xmlns:a16="http://schemas.microsoft.com/office/drawing/2014/main" id="{3CD3EA6A-C0C4-CE84-58E0-2AA4D305FC76}"/>
+            </a:ext>
+          </a:extLst>
+        </p:cNvPr>
+        <p:cNvGrpSpPr/>
+        <p:nvPr/>
+      </p:nvGrpSpPr>
+      <p:grpSpPr>
+        <a:xfrm>
+          <a:off x="0" y="0"/>
+          <a:ext cx="0" cy="0"/>
+          <a:chOff x="0" y="0"/>
+          <a:chExt cx="0" cy="0"/>
+        </a:xfrm>
+      </p:grpSpPr>
+      <p:sp>
+        <p:nvSpPr>
+          <p:cNvPr id="5" name="內容版面配置區 4">
+            <a:extLst>
+              <a:ext uri="{FF2B5EF4-FFF2-40B4-BE49-F238E27FC236}">
+                <a16:creationId xmlns:a16="http://schemas.microsoft.com/office/drawing/2014/main" id="{9AF68A97-5C77-79F5-6283-E11CFC21FC6C}"/>
+              </a:ext>
+            </a:extLst>
+          </p:cNvPr>
+          <p:cNvSpPr>
+            <a:spLocks noGrp="1"/>
+          </p:cNvSpPr>
+          <p:nvPr>
+            <p:ph idx="1"/>
+          </p:nvPr>
+        </p:nvSpPr>
+        <p:spPr>
+          <a:xfrm>
+            <a:off x="0" y="1563639"/>
+            <a:ext cx="9144000" cy="1803647"/>
+          </a:xfrm>
+        </p:spPr>
+        <p:txBody>
+          <a:bodyPr anchor="ctr">
+            <a:normAutofit/>
+          </a:bodyPr>
+          <a:lstStyle/>
+          <a:p>
+            <a:pPr marL="0" indent="0" algn="ctr">
+              <a:buNone/>
+            </a:pPr>
+            <a:r>
+              <a:rPr lang="zh-TW" altLang="en-US" sz="4800" b="1" dirty="0">
+                <a:solidFill>
+                  <a:srgbClr val="000066"/>
+                </a:solidFill>
+                <a:latin typeface="Microsoft JhengHei" pitchFamily="34" charset="-120"/>
+                <a:ea typeface="Microsoft JhengHei" pitchFamily="34" charset="-120"/>
+              </a:rPr>
+              <a:t>天上諸天  當為紙張</a:t>
+            </a:r>
+          </a:p>
+          <a:p>
+            <a:pPr marL="0" indent="0" algn="ctr">
+              <a:buNone/>
+            </a:pPr>
+            <a:r>
+              <a:rPr lang="zh-TW" altLang="en-US" sz="4800" b="1" dirty="0">
+                <a:solidFill>
+                  <a:srgbClr val="000066"/>
+                </a:solidFill>
+                <a:latin typeface="Microsoft JhengHei" pitchFamily="34" charset="-120"/>
+                <a:ea typeface="Microsoft JhengHei" pitchFamily="34" charset="-120"/>
+              </a:rPr>
+              <a:t>地下萬莖  當為筆桿</a:t>
+            </a:r>
+          </a:p>
+        </p:txBody>
+      </p:sp>
+      <p:sp>
+        <p:nvSpPr>
+          <p:cNvPr id="3" name="TextBox 2">
+            <a:extLst>
+              <a:ext uri="{FF2B5EF4-FFF2-40B4-BE49-F238E27FC236}">
+                <a16:creationId xmlns:a16="http://schemas.microsoft.com/office/drawing/2014/main" id="{98D186D4-1739-9938-608A-DFA0BA166083}"/>
+              </a:ext>
+            </a:extLst>
+          </p:cNvPr>
+          <p:cNvSpPr txBox="1"/>
+          <p:nvPr/>
+        </p:nvSpPr>
+        <p:spPr>
+          <a:xfrm>
+            <a:off x="0" y="3795887"/>
+            <a:ext cx="9144000" cy="523220"/>
+          </a:xfrm>
+          <a:prstGeom prst="rect">
+            <a:avLst/>
+          </a:prstGeom>
+          <a:noFill/>
+        </p:spPr>
+        <p:txBody>
+          <a:bodyPr wrap="square" rtlCol="0">
+            <a:spAutoFit/>
+          </a:bodyPr>
+          <a:lstStyle/>
+          <a:p>
+            <a:pPr algn="ctr"/>
+            <a:r>
+              <a:rPr lang="en-US" sz="2800" b="1" dirty="0">
+                <a:solidFill>
+                  <a:srgbClr val="000066"/>
+                </a:solidFill>
+              </a:rPr>
+              <a:t>( 2 / 2 )</a:t>
+            </a:r>
+            <a:endParaRPr lang="vi-VN" sz="2800" b="1" dirty="0">
               <a:solidFill>
                 <a:srgbClr val="000066"/>
               </a:solidFill>
-              <a:latin typeface="微軟正黑體" pitchFamily="34" charset="-120"/>
-              <a:ea typeface="微軟正黑體" pitchFamily="34" charset="-120"/>
             </a:endParaRPr>
           </a:p>
         </p:txBody>
       </p:sp>
-      <p:sp>
-        <p:nvSpPr>
-          <p:cNvPr id="4" name="內容版面配置區 3"/>
+    </p:spTree>
+    <p:extLst>
+      <p:ext uri="{BB962C8B-B14F-4D97-AF65-F5344CB8AC3E}">
+        <p14:creationId xmlns:p14="http://schemas.microsoft.com/office/powerpoint/2010/main" val="2683592233"/>
+      </p:ext>
+    </p:extLst>
+  </p:cSld>
+  <p:clrMapOvr>
+    <a:masterClrMapping/>
+  </p:clrMapOvr>
+</p:sld>
+</file>
+
+<file path=ppt/slides/slide9.xml><?xml version="1.0" encoding="utf-8"?>
+<p:sld xmlns:a="http://schemas.openxmlformats.org/drawingml/2006/main" xmlns:r="http://schemas.openxmlformats.org/officeDocument/2006/relationships" xmlns:p="http://schemas.openxmlformats.org/presentationml/2006/main">
+  <p:cSld>
+    <p:spTree>
+      <p:nvGrpSpPr>
+        <p:cNvPr id="1" name="">
+          <a:extLst>
+            <a:ext uri="{FF2B5EF4-FFF2-40B4-BE49-F238E27FC236}">
+              <a16:creationId xmlns:a16="http://schemas.microsoft.com/office/drawing/2014/main" id="{2EA3C3D9-5A59-A4CC-691F-F86D5794DE2C}"/>
+            </a:ext>
+          </a:extLst>
+        </p:cNvPr>
+        <p:cNvGrpSpPr/>
+        <p:nvPr/>
+      </p:nvGrpSpPr>
+      <p:grpSpPr>
+        <a:xfrm>
+          <a:off x="0" y="0"/>
+          <a:ext cx="0" cy="0"/>
+          <a:chOff x="0" y="0"/>
+          <a:chExt cx="0" cy="0"/>
+        </a:xfrm>
+      </p:grpSpPr>
+      <p:sp>
+        <p:nvSpPr>
+          <p:cNvPr id="5" name="內容版面配置區 4">
+            <a:extLst>
+              <a:ext uri="{FF2B5EF4-FFF2-40B4-BE49-F238E27FC236}">
+                <a16:creationId xmlns:a16="http://schemas.microsoft.com/office/drawing/2014/main" id="{51481613-9169-94F4-8FF4-934814B5D143}"/>
+              </a:ext>
+            </a:extLst>
+          </p:cNvPr>
           <p:cNvSpPr>
             <a:spLocks noGrp="1"/>
           </p:cNvSpPr>
@@ -4184,103 +4594,100 @@
             <p:ph idx="1"/>
           </p:nvPr>
         </p:nvSpPr>
-        <p:spPr/>
-        <p:txBody>
-          <a:bodyPr>
-            <a:noAutofit/>
+        <p:spPr>
+          <a:xfrm>
+            <a:off x="0" y="1563639"/>
+            <a:ext cx="9144000" cy="1803647"/>
+          </a:xfrm>
+        </p:spPr>
+        <p:txBody>
+          <a:bodyPr anchor="ctr">
+            <a:normAutofit/>
           </a:bodyPr>
           <a:lstStyle/>
           <a:p>
-            <a:pPr algn="ctr">
+            <a:pPr marL="0" indent="0" algn="ctr">
               <a:buNone/>
             </a:pPr>
             <a:r>
-              <a:rPr lang="zh-CN" altLang="en-US" sz="4800" b="1" dirty="0">
+              <a:rPr lang="zh-TW" altLang="en-US" sz="4800" b="1" dirty="0">
                 <a:solidFill>
                   <a:srgbClr val="000066"/>
                 </a:solidFill>
-                <a:latin typeface="微軟正黑體" pitchFamily="34" charset="-120"/>
-                <a:ea typeface="微軟正黑體" pitchFamily="34" charset="-120"/>
+                <a:latin typeface="Microsoft JhengHei" pitchFamily="34" charset="-120"/>
+                <a:ea typeface="Microsoft JhengHei" pitchFamily="34" charset="-120"/>
               </a:rPr>
-              <a:t>阿神之愛 何等豐富</a:t>
-            </a:r>
-            <a:endParaRPr lang="en-US" altLang="zh-CN" sz="4800" b="1" dirty="0">
+              <a:t>世上海洋  當為墨水</a:t>
+            </a:r>
+          </a:p>
+          <a:p>
+            <a:pPr marL="0" indent="0" algn="ctr">
+              <a:buNone/>
+            </a:pPr>
+            <a:r>
+              <a:rPr lang="zh-TW" altLang="en-US" sz="4800" b="1" dirty="0">
+                <a:solidFill>
+                  <a:srgbClr val="000066"/>
+                </a:solidFill>
+                <a:latin typeface="Microsoft JhengHei" pitchFamily="34" charset="-120"/>
+                <a:ea typeface="Microsoft JhengHei" pitchFamily="34" charset="-120"/>
+              </a:rPr>
+              <a:t>全球文人  集合苦幹</a:t>
+            </a:r>
+          </a:p>
+        </p:txBody>
+      </p:sp>
+      <p:sp>
+        <p:nvSpPr>
+          <p:cNvPr id="3" name="TextBox 2">
+            <a:extLst>
+              <a:ext uri="{FF2B5EF4-FFF2-40B4-BE49-F238E27FC236}">
+                <a16:creationId xmlns:a16="http://schemas.microsoft.com/office/drawing/2014/main" id="{60576E6B-6DAD-B476-5CA6-D1DAD2842FD7}"/>
+              </a:ext>
+            </a:extLst>
+          </p:cNvPr>
+          <p:cNvSpPr txBox="1"/>
+          <p:nvPr/>
+        </p:nvSpPr>
+        <p:spPr>
+          <a:xfrm>
+            <a:off x="0" y="3795887"/>
+            <a:ext cx="9144000" cy="523220"/>
+          </a:xfrm>
+          <a:prstGeom prst="rect">
+            <a:avLst/>
+          </a:prstGeom>
+          <a:noFill/>
+        </p:spPr>
+        <p:txBody>
+          <a:bodyPr wrap="square" rtlCol="0">
+            <a:spAutoFit/>
+          </a:bodyPr>
+          <a:lstStyle/>
+          <a:p>
+            <a:pPr algn="ctr"/>
+            <a:r>
+              <a:rPr lang="en-US" sz="2800" b="1" dirty="0">
+                <a:solidFill>
+                  <a:srgbClr val="000066"/>
+                </a:solidFill>
+              </a:rPr>
+              <a:t>( 2 / 2 )</a:t>
+            </a:r>
+            <a:endParaRPr lang="vi-VN" sz="2800" b="1" dirty="0">
               <a:solidFill>
                 <a:srgbClr val="000066"/>
               </a:solidFill>
-              <a:latin typeface="微軟正黑體" pitchFamily="34" charset="-120"/>
-              <a:ea typeface="微軟正黑體" pitchFamily="34" charset="-120"/>
             </a:endParaRPr>
           </a:p>
-          <a:p>
-            <a:pPr algn="ctr">
-              <a:buNone/>
-            </a:pPr>
-            <a:r>
-              <a:rPr lang="zh-CN" altLang="en-US" sz="4800" b="1" dirty="0">
-                <a:solidFill>
-                  <a:srgbClr val="000066"/>
-                </a:solidFill>
-                <a:latin typeface="微軟正黑體" pitchFamily="34" charset="-120"/>
-                <a:ea typeface="微軟正黑體" pitchFamily="34" charset="-120"/>
-              </a:rPr>
-              <a:t>偉大無限無量</a:t>
-            </a:r>
-            <a:endParaRPr lang="en-US" altLang="zh-CN" sz="4800" b="1" dirty="0">
-              <a:solidFill>
-                <a:srgbClr val="000066"/>
-              </a:solidFill>
-              <a:latin typeface="微軟正黑體" pitchFamily="34" charset="-120"/>
-              <a:ea typeface="微軟正黑體" pitchFamily="34" charset="-120"/>
-            </a:endParaRPr>
-          </a:p>
-          <a:p>
-            <a:pPr algn="ctr">
-              <a:buNone/>
-            </a:pPr>
-            <a:r>
-              <a:rPr lang="zh-CN" altLang="en-US" sz="4800" b="1" dirty="0">
-                <a:solidFill>
-                  <a:srgbClr val="000066"/>
-                </a:solidFill>
-                <a:latin typeface="微軟正黑體" pitchFamily="34" charset="-120"/>
-                <a:ea typeface="微軟正黑體" pitchFamily="34" charset="-120"/>
-              </a:rPr>
-              <a:t>永遠堅定 永遠不變</a:t>
-            </a:r>
-            <a:endParaRPr lang="en-US" altLang="zh-CN" sz="4800" b="1" dirty="0">
-              <a:solidFill>
-                <a:srgbClr val="000066"/>
-              </a:solidFill>
-              <a:latin typeface="微軟正黑體" pitchFamily="34" charset="-120"/>
-              <a:ea typeface="微軟正黑體" pitchFamily="34" charset="-120"/>
-            </a:endParaRPr>
-          </a:p>
-          <a:p>
-            <a:pPr algn="ctr">
-              <a:buNone/>
-            </a:pPr>
-            <a:r>
-              <a:rPr lang="zh-CN" altLang="en-US" sz="4800" b="1" dirty="0">
-                <a:solidFill>
-                  <a:srgbClr val="000066"/>
-                </a:solidFill>
-                <a:latin typeface="微軟正黑體" pitchFamily="34" charset="-120"/>
-                <a:ea typeface="微軟正黑體" pitchFamily="34" charset="-120"/>
-              </a:rPr>
-              <a:t>天使聖徒頌揚</a:t>
-            </a:r>
-            <a:endParaRPr lang="zh-TW" altLang="en-US" sz="4800" b="1" dirty="0">
-              <a:solidFill>
-                <a:srgbClr val="000066"/>
-              </a:solidFill>
-              <a:latin typeface="微軟正黑體" pitchFamily="34" charset="-120"/>
-              <a:ea typeface="微軟正黑體" pitchFamily="34" charset="-120"/>
-            </a:endParaRPr>
-          </a:p>
         </p:txBody>
       </p:sp>
     </p:spTree>
+    <p:extLst>
+      <p:ext uri="{BB962C8B-B14F-4D97-AF65-F5344CB8AC3E}">
+        <p14:creationId xmlns:p14="http://schemas.microsoft.com/office/powerpoint/2010/main" val="1762132399"/>
+      </p:ext>
+    </p:extLst>
   </p:cSld>
   <p:clrMapOvr>
     <a:masterClrMapping/>
